--- a/public/lessons/year-6-maths/autumn/week-9/revisit-fraction-calculation/teaching-powerpoint-v1.pptx
+++ b/public/lessons/year-6-maths/autumn/week-9/revisit-fraction-calculation/teaching-powerpoint-v1.pptx
@@ -2,24 +2,24 @@
 <file path=ppt/presentation.xml><?xml version="1.0" encoding="utf-8"?>
 <p:presentation xmlns:p="http://schemas.openxmlformats.org/presentationml/2006/main">
   <p:sldMasterIdLst>
-    <p:sldMasterId xmlns:r="http://schemas.openxmlformats.org/officeDocument/2006/relationships" id="2147483648" r:id="Rebbf0bf72e0d4215"/>
+    <p:sldMasterId xmlns:r="http://schemas.openxmlformats.org/officeDocument/2006/relationships" id="2147483648" r:id="R21b3d2e07ff04830"/>
   </p:sldMasterIdLst>
   <p:notesMasterIdLst>
-    <p:notesMasterId xmlns:r="http://schemas.openxmlformats.org/officeDocument/2006/relationships" r:id="Rae223a928d2847f5"/>
+    <p:notesMasterId xmlns:r="http://schemas.openxmlformats.org/officeDocument/2006/relationships" r:id="R93e0456a7abd4c0b"/>
   </p:notesMasterIdLst>
   <p:sldIdLst>
-    <p:sldId xmlns:r="http://schemas.openxmlformats.org/officeDocument/2006/relationships" id="256" r:id="R4b0f4377265b4c1c"/>
-    <p:sldId xmlns:r="http://schemas.openxmlformats.org/officeDocument/2006/relationships" id="257" r:id="R9467079e534c4b60"/>
-    <p:sldId xmlns:r="http://schemas.openxmlformats.org/officeDocument/2006/relationships" id="258" r:id="R110bbc814829414c"/>
-    <p:sldId xmlns:r="http://schemas.openxmlformats.org/officeDocument/2006/relationships" id="259" r:id="Rce25a64fd7b54d27"/>
-    <p:sldId xmlns:r="http://schemas.openxmlformats.org/officeDocument/2006/relationships" id="260" r:id="Rc2f80d29a6344dca"/>
-    <p:sldId xmlns:r="http://schemas.openxmlformats.org/officeDocument/2006/relationships" id="261" r:id="Ra52ec868addc4658"/>
-    <p:sldId xmlns:r="http://schemas.openxmlformats.org/officeDocument/2006/relationships" id="262" r:id="Re299bc810d914831"/>
-    <p:sldId xmlns:r="http://schemas.openxmlformats.org/officeDocument/2006/relationships" id="263" r:id="Rbe028110bf6d4072"/>
-    <p:sldId xmlns:r="http://schemas.openxmlformats.org/officeDocument/2006/relationships" id="264" r:id="R36b2d62fbb8e4fb5"/>
-    <p:sldId xmlns:r="http://schemas.openxmlformats.org/officeDocument/2006/relationships" id="265" r:id="R60e9f7a90adb4d42"/>
-    <p:sldId xmlns:r="http://schemas.openxmlformats.org/officeDocument/2006/relationships" id="266" r:id="R6b35c24490fb4a95"/>
-    <p:sldId xmlns:r="http://schemas.openxmlformats.org/officeDocument/2006/relationships" id="267" r:id="R6b80537913204074"/>
+    <p:sldId xmlns:r="http://schemas.openxmlformats.org/officeDocument/2006/relationships" id="256" r:id="R8adb55ed252b4a19"/>
+    <p:sldId xmlns:r="http://schemas.openxmlformats.org/officeDocument/2006/relationships" id="257" r:id="R24d80ecaec844da4"/>
+    <p:sldId xmlns:r="http://schemas.openxmlformats.org/officeDocument/2006/relationships" id="258" r:id="Rb559844d3aa246b7"/>
+    <p:sldId xmlns:r="http://schemas.openxmlformats.org/officeDocument/2006/relationships" id="259" r:id="R8caba87048404e82"/>
+    <p:sldId xmlns:r="http://schemas.openxmlformats.org/officeDocument/2006/relationships" id="260" r:id="Rbb2551d68fcf4e5c"/>
+    <p:sldId xmlns:r="http://schemas.openxmlformats.org/officeDocument/2006/relationships" id="261" r:id="Rc7668807715d43ce"/>
+    <p:sldId xmlns:r="http://schemas.openxmlformats.org/officeDocument/2006/relationships" id="262" r:id="R819517b3af6d4b6b"/>
+    <p:sldId xmlns:r="http://schemas.openxmlformats.org/officeDocument/2006/relationships" id="263" r:id="R1b6e35d1fea747ba"/>
+    <p:sldId xmlns:r="http://schemas.openxmlformats.org/officeDocument/2006/relationships" id="264" r:id="Rcecbbaf00c7941d3"/>
+    <p:sldId xmlns:r="http://schemas.openxmlformats.org/officeDocument/2006/relationships" id="265" r:id="R9d9bf76300674846"/>
+    <p:sldId xmlns:r="http://schemas.openxmlformats.org/officeDocument/2006/relationships" id="266" r:id="Readf7c72a80848a3"/>
+    <p:sldId xmlns:r="http://schemas.openxmlformats.org/officeDocument/2006/relationships" id="267" r:id="Rb972cebcbc574c09"/>
   </p:sldIdLst>
   <p:sldSz cx="12192000" cy="6858000"/>
   <p:notesSz cx="6858000" cy="9144000"/>
@@ -873,7 +873,7 @@
           <a:lstStyle xmlns:a="http://schemas.openxmlformats.org/drawingml/2006/main"/>
           <a:p xmlns:a="http://schemas.openxmlformats.org/drawingml/2006/main">
             <a:r>
-              <a:t>I do. Reveal the question, setup and each calculation stage one click at a time. Pupils watch before copying. Model answer: 11/8 or 1 3/8.</a:t>
+              <a:t>I do. Reveal the question, then reveal each mathematical change one click at a time. Point to the numbers and operation that changed before moving to the next line. Final answer: 11/8 or 1 3/8.</a:t>
             </a:r>
           </a:p>
         </p:txBody>
@@ -1291,7 +1291,7 @@
   </p:cSld>
   <p:clrMap bg1="lt1" tx1="dk1" bg2="lt2" tx2="dk2" accent1="accent1" accent2="accent2" accent3="accent3" accent4="accent4" accent5="accent5" accent6="accent6" hlink="hlink" folHlink="folHlink"/>
   <p:sldLayoutIdLst>
-    <p:sldLayoutId xmlns:r="http://schemas.openxmlformats.org/officeDocument/2006/relationships" id="2147483649" r:id="R267de837603a4233"/>
+    <p:sldLayoutId xmlns:r="http://schemas.openxmlformats.org/officeDocument/2006/relationships" id="2147483649" r:id="R37bcbcc53e144528"/>
   </p:sldLayoutIdLst>
   <p:txStyles>
     <p:titleStyle>
@@ -1842,7 +1842,7 @@
           <p:cNvPr id="12" name="">
             <a:extLst xmlns:a="http://schemas.openxmlformats.org/drawingml/2006/main">
               <a:ext uri="{FF2B5EF4-FFF2-40B4-BE49-F238E27FC236}">
-                <a16:creationId xmlns:a16="http://schemas.microsoft.com/office/drawing/2014/main" id="{9E5BDA21-27EE-4E3B-A7FB-633C96D3252D}"/>
+                <a16:creationId xmlns:a16="http://schemas.microsoft.com/office/drawing/2014/main" id="{0374E406-DEA6-4462-9A6E-7118E000A230}"/>
               </a:ext>
             </a:extLst>
           </p:cNvPr>
@@ -1874,7 +1874,7 @@
           <p:cNvPr id="2" name="">
             <a:extLst xmlns:a="http://schemas.openxmlformats.org/drawingml/2006/main">
               <a:ext uri="{FF2B5EF4-FFF2-40B4-BE49-F238E27FC236}">
-                <a16:creationId xmlns:a16="http://schemas.microsoft.com/office/drawing/2014/main" id="{E579C74E-E79D-4C3C-AA7A-0A3C1C9239CC}"/>
+                <a16:creationId xmlns:a16="http://schemas.microsoft.com/office/drawing/2014/main" id="{B5A1C7C3-0F13-4D2F-8968-C12CBA44A46F}"/>
               </a:ext>
             </a:extLst>
           </p:cNvPr>
@@ -1931,7 +1931,7 @@
           <p:cNvPr id="3" name="">
             <a:extLst xmlns:a="http://schemas.openxmlformats.org/drawingml/2006/main">
               <a:ext uri="{FF2B5EF4-FFF2-40B4-BE49-F238E27FC236}">
-                <a16:creationId xmlns:a16="http://schemas.microsoft.com/office/drawing/2014/main" id="{5C8398BF-4C2E-457A-9A33-6D829FA1DCD5}"/>
+                <a16:creationId xmlns:a16="http://schemas.microsoft.com/office/drawing/2014/main" id="{BA626DC0-7A4A-4079-A3E9-49D264E34706}"/>
               </a:ext>
             </a:extLst>
           </p:cNvPr>
@@ -1965,7 +1965,7 @@
           <p:cNvPr id="4" name="">
             <a:extLst xmlns:a="http://schemas.openxmlformats.org/drawingml/2006/main">
               <a:ext uri="{FF2B5EF4-FFF2-40B4-BE49-F238E27FC236}">
-                <a16:creationId xmlns:a16="http://schemas.microsoft.com/office/drawing/2014/main" id="{62C48310-AF63-473F-9C3B-BE4A88A906A2}"/>
+                <a16:creationId xmlns:a16="http://schemas.microsoft.com/office/drawing/2014/main" id="{074D50FA-AF9F-4518-AF81-BA8CB733C872}"/>
               </a:ext>
             </a:extLst>
           </p:cNvPr>
@@ -2022,7 +2022,7 @@
           <p:cNvPr id="5" name="">
             <a:extLst xmlns:a="http://schemas.openxmlformats.org/drawingml/2006/main">
               <a:ext uri="{FF2B5EF4-FFF2-40B4-BE49-F238E27FC236}">
-                <a16:creationId xmlns:a16="http://schemas.microsoft.com/office/drawing/2014/main" id="{8506BB13-4E98-4483-A86E-263BBC07BBB3}"/>
+                <a16:creationId xmlns:a16="http://schemas.microsoft.com/office/drawing/2014/main" id="{CC7BEA7E-475F-4DF2-B2B1-856A550D21C1}"/>
               </a:ext>
             </a:extLst>
           </p:cNvPr>
@@ -2079,7 +2079,7 @@
           <p:cNvPr id="6" name="">
             <a:extLst xmlns:a="http://schemas.openxmlformats.org/drawingml/2006/main">
               <a:ext uri="{FF2B5EF4-FFF2-40B4-BE49-F238E27FC236}">
-                <a16:creationId xmlns:a16="http://schemas.microsoft.com/office/drawing/2014/main" id="{F2A0DC8E-D4D3-4D87-AA79-33BCE9FF1876}"/>
+                <a16:creationId xmlns:a16="http://schemas.microsoft.com/office/drawing/2014/main" id="{90C0B6AF-B255-43D2-ADFD-CFC11E6156B5}"/>
               </a:ext>
             </a:extLst>
           </p:cNvPr>
@@ -2113,7 +2113,7 @@
           <p:cNvPr id="7" name="">
             <a:extLst xmlns:a="http://schemas.openxmlformats.org/drawingml/2006/main">
               <a:ext uri="{FF2B5EF4-FFF2-40B4-BE49-F238E27FC236}">
-                <a16:creationId xmlns:a16="http://schemas.microsoft.com/office/drawing/2014/main" id="{F936AA59-979D-46DA-AD9F-7F7EA170DE4B}"/>
+                <a16:creationId xmlns:a16="http://schemas.microsoft.com/office/drawing/2014/main" id="{0F170A3D-327E-4093-B9C3-2E6DB9C2C945}"/>
               </a:ext>
             </a:extLst>
           </p:cNvPr>
@@ -2170,7 +2170,7 @@
           <p:cNvPr id="8" name="">
             <a:extLst xmlns:a="http://schemas.openxmlformats.org/drawingml/2006/main">
               <a:ext uri="{FF2B5EF4-FFF2-40B4-BE49-F238E27FC236}">
-                <a16:creationId xmlns:a16="http://schemas.microsoft.com/office/drawing/2014/main" id="{018F6134-FE1C-447A-AC74-FE9263B1EDD1}"/>
+                <a16:creationId xmlns:a16="http://schemas.microsoft.com/office/drawing/2014/main" id="{EFC19137-815E-4197-9E08-916296C75272}"/>
               </a:ext>
             </a:extLst>
           </p:cNvPr>
@@ -2227,7 +2227,7 @@
           <p:cNvPr id="9" name="">
             <a:extLst xmlns:a="http://schemas.openxmlformats.org/drawingml/2006/main">
               <a:ext uri="{FF2B5EF4-FFF2-40B4-BE49-F238E27FC236}">
-                <a16:creationId xmlns:a16="http://schemas.microsoft.com/office/drawing/2014/main" id="{19AC7AB1-E146-4246-81FD-C1442D181B7B}"/>
+                <a16:creationId xmlns:a16="http://schemas.microsoft.com/office/drawing/2014/main" id="{E8592D71-7135-4231-9675-9861BECBAC03}"/>
               </a:ext>
             </a:extLst>
           </p:cNvPr>
@@ -2284,7 +2284,7 @@
           <p:cNvPr id="10" name="">
             <a:extLst xmlns:a="http://schemas.openxmlformats.org/drawingml/2006/main">
               <a:ext uri="{FF2B5EF4-FFF2-40B4-BE49-F238E27FC236}">
-                <a16:creationId xmlns:a16="http://schemas.microsoft.com/office/drawing/2014/main" id="{06B5E8D9-4452-4F02-A2EC-998479027842}"/>
+                <a16:creationId xmlns:a16="http://schemas.microsoft.com/office/drawing/2014/main" id="{3B99158C-5ED1-4796-AEBA-C6953F2CD460}"/>
               </a:ext>
             </a:extLst>
           </p:cNvPr>
@@ -2341,7 +2341,7 @@
           <p:cNvPr id="11" name="">
             <a:extLst xmlns:a="http://schemas.openxmlformats.org/drawingml/2006/main">
               <a:ext uri="{FF2B5EF4-FFF2-40B4-BE49-F238E27FC236}">
-                <a16:creationId xmlns:a16="http://schemas.microsoft.com/office/drawing/2014/main" id="{A3459DCD-3F53-45C7-B5CE-785CD98712C6}"/>
+                <a16:creationId xmlns:a16="http://schemas.microsoft.com/office/drawing/2014/main" id="{CA549A9E-17BA-490D-B8C5-967596D33025}"/>
               </a:ext>
             </a:extLst>
           </p:cNvPr>
@@ -2396,7 +2396,7 @@
     </p:spTree>
     <p:extLst>
       <p:ext uri="{BB962C8B-B14F-4D97-AF65-F5344CB8AC3E}">
-        <p14:creationId xmlns:p14="http://schemas.microsoft.com/office/powerpoint/2010/main" val="1753189535"/>
+        <p14:creationId xmlns:p14="http://schemas.microsoft.com/office/powerpoint/2010/main" val="1970643611"/>
       </p:ext>
     </p:extLst>
   </p:cSld>
@@ -2427,7 +2427,7 @@
           <p:cNvPr id="14" name="">
             <a:extLst xmlns:a="http://schemas.openxmlformats.org/drawingml/2006/main">
               <a:ext uri="{FF2B5EF4-FFF2-40B4-BE49-F238E27FC236}">
-                <a16:creationId xmlns:a16="http://schemas.microsoft.com/office/drawing/2014/main" id="{E96B4CB2-AD34-45ED-82E1-520FC666F646}"/>
+                <a16:creationId xmlns:a16="http://schemas.microsoft.com/office/drawing/2014/main" id="{127B18A5-6BC5-4F7D-B534-52DB86F616A2}"/>
               </a:ext>
             </a:extLst>
           </p:cNvPr>
@@ -2459,7 +2459,7 @@
           <p:cNvPr id="2" name="">
             <a:extLst xmlns:a="http://schemas.openxmlformats.org/drawingml/2006/main">
               <a:ext uri="{FF2B5EF4-FFF2-40B4-BE49-F238E27FC236}">
-                <a16:creationId xmlns:a16="http://schemas.microsoft.com/office/drawing/2014/main" id="{3891F3D7-5C4F-444C-84A4-3A1161EBEEEB}"/>
+                <a16:creationId xmlns:a16="http://schemas.microsoft.com/office/drawing/2014/main" id="{42EC096B-AA74-47F2-ACF4-FE81A6888C1F}"/>
               </a:ext>
             </a:extLst>
           </p:cNvPr>
@@ -2516,7 +2516,7 @@
           <p:cNvPr id="3" name="">
             <a:extLst xmlns:a="http://schemas.openxmlformats.org/drawingml/2006/main">
               <a:ext uri="{FF2B5EF4-FFF2-40B4-BE49-F238E27FC236}">
-                <a16:creationId xmlns:a16="http://schemas.microsoft.com/office/drawing/2014/main" id="{03F91EF0-E60C-4DAF-809C-34618DB0A241}"/>
+                <a16:creationId xmlns:a16="http://schemas.microsoft.com/office/drawing/2014/main" id="{A116E072-CE99-485F-907E-27FB9F948394}"/>
               </a:ext>
             </a:extLst>
           </p:cNvPr>
@@ -2548,7 +2548,7 @@
           <p:cNvPr id="4" name="">
             <a:extLst xmlns:a="http://schemas.openxmlformats.org/drawingml/2006/main">
               <a:ext uri="{FF2B5EF4-FFF2-40B4-BE49-F238E27FC236}">
-                <a16:creationId xmlns:a16="http://schemas.microsoft.com/office/drawing/2014/main" id="{4CEAFB75-A04F-4DEA-ACF5-34CC5FBEF17F}"/>
+                <a16:creationId xmlns:a16="http://schemas.microsoft.com/office/drawing/2014/main" id="{039F6645-AC8B-49C2-B1CE-EC58B5F69F39}"/>
               </a:ext>
             </a:extLst>
           </p:cNvPr>
@@ -2605,7 +2605,7 @@
           <p:cNvPr id="5" name="">
             <a:extLst xmlns:a="http://schemas.openxmlformats.org/drawingml/2006/main">
               <a:ext uri="{FF2B5EF4-FFF2-40B4-BE49-F238E27FC236}">
-                <a16:creationId xmlns:a16="http://schemas.microsoft.com/office/drawing/2014/main" id="{6A81E0B8-A182-43A0-A5AC-8068D4A435B4}"/>
+                <a16:creationId xmlns:a16="http://schemas.microsoft.com/office/drawing/2014/main" id="{85BFBF3B-9B06-4521-933C-58E910F040FB}"/>
               </a:ext>
             </a:extLst>
           </p:cNvPr>
@@ -2662,7 +2662,7 @@
           <p:cNvPr id="6" name="">
             <a:extLst xmlns:a="http://schemas.openxmlformats.org/drawingml/2006/main">
               <a:ext uri="{FF2B5EF4-FFF2-40B4-BE49-F238E27FC236}">
-                <a16:creationId xmlns:a16="http://schemas.microsoft.com/office/drawing/2014/main" id="{1073813C-E7E2-4E6C-9C82-0C436F12AB72}"/>
+                <a16:creationId xmlns:a16="http://schemas.microsoft.com/office/drawing/2014/main" id="{029F2E38-3507-4A0D-9C16-F9CED503E58D}"/>
               </a:ext>
             </a:extLst>
           </p:cNvPr>
@@ -2719,7 +2719,7 @@
           <p:cNvPr id="7" name="">
             <a:extLst xmlns:a="http://schemas.openxmlformats.org/drawingml/2006/main">
               <a:ext uri="{FF2B5EF4-FFF2-40B4-BE49-F238E27FC236}">
-                <a16:creationId xmlns:a16="http://schemas.microsoft.com/office/drawing/2014/main" id="{12574AD7-EA60-40C1-BBF9-FFAC22B3CC86}"/>
+                <a16:creationId xmlns:a16="http://schemas.microsoft.com/office/drawing/2014/main" id="{BC74F055-0F15-4A93-B7E2-708FC25313AE}"/>
               </a:ext>
             </a:extLst>
           </p:cNvPr>
@@ -2751,7 +2751,7 @@
           <p:cNvPr id="8" name="">
             <a:extLst xmlns:a="http://schemas.openxmlformats.org/drawingml/2006/main">
               <a:ext uri="{FF2B5EF4-FFF2-40B4-BE49-F238E27FC236}">
-                <a16:creationId xmlns:a16="http://schemas.microsoft.com/office/drawing/2014/main" id="{6F374498-3C00-4953-BB5E-9F85B9DDCBCA}"/>
+                <a16:creationId xmlns:a16="http://schemas.microsoft.com/office/drawing/2014/main" id="{AD1ED0D3-2B3E-4BBD-BB6F-5D5365FC1EF2}"/>
               </a:ext>
             </a:extLst>
           </p:cNvPr>
@@ -2808,7 +2808,7 @@
           <p:cNvPr id="9" name="">
             <a:extLst xmlns:a="http://schemas.openxmlformats.org/drawingml/2006/main">
               <a:ext uri="{FF2B5EF4-FFF2-40B4-BE49-F238E27FC236}">
-                <a16:creationId xmlns:a16="http://schemas.microsoft.com/office/drawing/2014/main" id="{87397DD9-D945-42CF-86E3-0A8C4DE3C74D}"/>
+                <a16:creationId xmlns:a16="http://schemas.microsoft.com/office/drawing/2014/main" id="{E647A557-1C32-425E-A434-2A2D8C014B1B}"/>
               </a:ext>
             </a:extLst>
           </p:cNvPr>
@@ -2865,7 +2865,7 @@
           <p:cNvPr id="10" name="">
             <a:extLst xmlns:a="http://schemas.openxmlformats.org/drawingml/2006/main">
               <a:ext uri="{FF2B5EF4-FFF2-40B4-BE49-F238E27FC236}">
-                <a16:creationId xmlns:a16="http://schemas.microsoft.com/office/drawing/2014/main" id="{2195C675-877D-4B2F-B295-B2430CBBD658}"/>
+                <a16:creationId xmlns:a16="http://schemas.microsoft.com/office/drawing/2014/main" id="{C571672D-F66E-412A-A83C-1DEB56BC0306}"/>
               </a:ext>
             </a:extLst>
           </p:cNvPr>
@@ -2922,7 +2922,7 @@
           <p:cNvPr id="11" name="">
             <a:extLst xmlns:a="http://schemas.openxmlformats.org/drawingml/2006/main">
               <a:ext uri="{FF2B5EF4-FFF2-40B4-BE49-F238E27FC236}">
-                <a16:creationId xmlns:a16="http://schemas.microsoft.com/office/drawing/2014/main" id="{9D73E283-DC87-485F-B401-EF580B83129F}"/>
+                <a16:creationId xmlns:a16="http://schemas.microsoft.com/office/drawing/2014/main" id="{A54ADD12-B11D-4F6A-B69F-262EDE4CDE48}"/>
               </a:ext>
             </a:extLst>
           </p:cNvPr>
@@ -2979,7 +2979,7 @@
           <p:cNvPr id="12" name="">
             <a:extLst xmlns:a="http://schemas.openxmlformats.org/drawingml/2006/main">
               <a:ext uri="{FF2B5EF4-FFF2-40B4-BE49-F238E27FC236}">
-                <a16:creationId xmlns:a16="http://schemas.microsoft.com/office/drawing/2014/main" id="{96DF5E78-31CC-45DC-97E1-CB073159F74C}"/>
+                <a16:creationId xmlns:a16="http://schemas.microsoft.com/office/drawing/2014/main" id="{4A28B072-FD54-4D40-9E03-49C813FB42C9}"/>
               </a:ext>
             </a:extLst>
           </p:cNvPr>
@@ -3036,7 +3036,7 @@
           <p:cNvPr id="13" name="">
             <a:extLst xmlns:a="http://schemas.openxmlformats.org/drawingml/2006/main">
               <a:ext uri="{FF2B5EF4-FFF2-40B4-BE49-F238E27FC236}">
-                <a16:creationId xmlns:a16="http://schemas.microsoft.com/office/drawing/2014/main" id="{69482136-319D-4232-ACA6-D9DC7517491F}"/>
+                <a16:creationId xmlns:a16="http://schemas.microsoft.com/office/drawing/2014/main" id="{8E88EDFE-AD69-472C-89AD-039C55F6B76A}"/>
               </a:ext>
             </a:extLst>
           </p:cNvPr>
@@ -3091,7 +3091,7 @@
     </p:spTree>
     <p:extLst>
       <p:ext uri="{BB962C8B-B14F-4D97-AF65-F5344CB8AC3E}">
-        <p14:creationId xmlns:p14="http://schemas.microsoft.com/office/powerpoint/2010/main" val="1618419355"/>
+        <p14:creationId xmlns:p14="http://schemas.microsoft.com/office/powerpoint/2010/main" val="1867933321"/>
       </p:ext>
     </p:extLst>
   </p:cSld>
@@ -3292,7 +3292,7 @@
           <p:cNvPr id="19" name="">
             <a:extLst xmlns:a="http://schemas.openxmlformats.org/drawingml/2006/main">
               <a:ext uri="{FF2B5EF4-FFF2-40B4-BE49-F238E27FC236}">
-                <a16:creationId xmlns:a16="http://schemas.microsoft.com/office/drawing/2014/main" id="{2DA40DAB-773E-473B-B0A9-B192CDCEA102}"/>
+                <a16:creationId xmlns:a16="http://schemas.microsoft.com/office/drawing/2014/main" id="{787E6F0F-13C6-4F29-879C-011D372388D5}"/>
               </a:ext>
             </a:extLst>
           </p:cNvPr>
@@ -3324,7 +3324,7 @@
           <p:cNvPr id="2" name="">
             <a:extLst xmlns:a="http://schemas.openxmlformats.org/drawingml/2006/main">
               <a:ext uri="{FF2B5EF4-FFF2-40B4-BE49-F238E27FC236}">
-                <a16:creationId xmlns:a16="http://schemas.microsoft.com/office/drawing/2014/main" id="{A0987033-B51D-4DC6-BC86-E8ACFFEC014E}"/>
+                <a16:creationId xmlns:a16="http://schemas.microsoft.com/office/drawing/2014/main" id="{30587FE2-BDD8-4B12-BBFE-A14178BCD888}"/>
               </a:ext>
             </a:extLst>
           </p:cNvPr>
@@ -3381,7 +3381,7 @@
           <p:cNvPr id="3" name="">
             <a:extLst xmlns:a="http://schemas.openxmlformats.org/drawingml/2006/main">
               <a:ext uri="{FF2B5EF4-FFF2-40B4-BE49-F238E27FC236}">
-                <a16:creationId xmlns:a16="http://schemas.microsoft.com/office/drawing/2014/main" id="{B212CF3C-7195-4ED0-9D66-AE51E3A8346F}"/>
+                <a16:creationId xmlns:a16="http://schemas.microsoft.com/office/drawing/2014/main" id="{B28C436E-6917-403C-A321-E4E6D0E966DC}"/>
               </a:ext>
             </a:extLst>
           </p:cNvPr>
@@ -3413,7 +3413,7 @@
           <p:cNvPr id="4" name="">
             <a:extLst xmlns:a="http://schemas.openxmlformats.org/drawingml/2006/main">
               <a:ext uri="{FF2B5EF4-FFF2-40B4-BE49-F238E27FC236}">
-                <a16:creationId xmlns:a16="http://schemas.microsoft.com/office/drawing/2014/main" id="{47294347-36C7-4431-971E-A7A08C10ABBC}"/>
+                <a16:creationId xmlns:a16="http://schemas.microsoft.com/office/drawing/2014/main" id="{96B78E9A-7126-44A2-8EE5-6A24103F500A}"/>
               </a:ext>
             </a:extLst>
           </p:cNvPr>
@@ -3470,7 +3470,7 @@
           <p:cNvPr id="5" name="">
             <a:extLst xmlns:a="http://schemas.openxmlformats.org/drawingml/2006/main">
               <a:ext uri="{FF2B5EF4-FFF2-40B4-BE49-F238E27FC236}">
-                <a16:creationId xmlns:a16="http://schemas.microsoft.com/office/drawing/2014/main" id="{8AC47DE0-2441-42C5-ADE1-2521DE067B18}"/>
+                <a16:creationId xmlns:a16="http://schemas.microsoft.com/office/drawing/2014/main" id="{B46B0DC9-2F31-4E81-ADC2-C42B5829B238}"/>
               </a:ext>
             </a:extLst>
           </p:cNvPr>
@@ -3527,7 +3527,7 @@
           <p:cNvPr id="6" name="">
             <a:extLst xmlns:a="http://schemas.openxmlformats.org/drawingml/2006/main">
               <a:ext uri="{FF2B5EF4-FFF2-40B4-BE49-F238E27FC236}">
-                <a16:creationId xmlns:a16="http://schemas.microsoft.com/office/drawing/2014/main" id="{1DE9C07F-1163-4151-83DD-35780E45385A}"/>
+                <a16:creationId xmlns:a16="http://schemas.microsoft.com/office/drawing/2014/main" id="{16401BBD-5E0B-4487-B3C7-CFD350D54A9A}"/>
               </a:ext>
             </a:extLst>
           </p:cNvPr>
@@ -3584,7 +3584,7 @@
           <p:cNvPr id="7" name="">
             <a:extLst xmlns:a="http://schemas.openxmlformats.org/drawingml/2006/main">
               <a:ext uri="{FF2B5EF4-FFF2-40B4-BE49-F238E27FC236}">
-                <a16:creationId xmlns:a16="http://schemas.microsoft.com/office/drawing/2014/main" id="{72097C83-2791-4B8E-9AB7-483FA4DF00A8}"/>
+                <a16:creationId xmlns:a16="http://schemas.microsoft.com/office/drawing/2014/main" id="{BB8AD4B1-9083-45CE-98EB-FCBA287AD83A}"/>
               </a:ext>
             </a:extLst>
           </p:cNvPr>
@@ -3616,7 +3616,7 @@
           <p:cNvPr id="8" name="">
             <a:extLst xmlns:a="http://schemas.openxmlformats.org/drawingml/2006/main">
               <a:ext uri="{FF2B5EF4-FFF2-40B4-BE49-F238E27FC236}">
-                <a16:creationId xmlns:a16="http://schemas.microsoft.com/office/drawing/2014/main" id="{BADD5F1E-4507-4149-97CE-942A6A3BF1E1}"/>
+                <a16:creationId xmlns:a16="http://schemas.microsoft.com/office/drawing/2014/main" id="{314BFCDE-498E-4424-9E20-4F899DC7DACE}"/>
               </a:ext>
             </a:extLst>
           </p:cNvPr>
@@ -3673,7 +3673,7 @@
           <p:cNvPr id="9" name="">
             <a:extLst xmlns:a="http://schemas.openxmlformats.org/drawingml/2006/main">
               <a:ext uri="{FF2B5EF4-FFF2-40B4-BE49-F238E27FC236}">
-                <a16:creationId xmlns:a16="http://schemas.microsoft.com/office/drawing/2014/main" id="{5626A6FC-1E98-444D-8221-6D3EF147ECE3}"/>
+                <a16:creationId xmlns:a16="http://schemas.microsoft.com/office/drawing/2014/main" id="{ABB11D80-EA67-4A09-91AE-CFAEA16BC7D0}"/>
               </a:ext>
             </a:extLst>
           </p:cNvPr>
@@ -3730,7 +3730,7 @@
           <p:cNvPr id="10" name="">
             <a:extLst xmlns:a="http://schemas.openxmlformats.org/drawingml/2006/main">
               <a:ext uri="{FF2B5EF4-FFF2-40B4-BE49-F238E27FC236}">
-                <a16:creationId xmlns:a16="http://schemas.microsoft.com/office/drawing/2014/main" id="{CD909E3F-5E63-4F10-84F9-3E8E79562CA4}"/>
+                <a16:creationId xmlns:a16="http://schemas.microsoft.com/office/drawing/2014/main" id="{A6FB40E7-0ABD-4B46-9094-27F6541B9881}"/>
               </a:ext>
             </a:extLst>
           </p:cNvPr>
@@ -3787,7 +3787,7 @@
           <p:cNvPr id="11" name="">
             <a:extLst xmlns:a="http://schemas.openxmlformats.org/drawingml/2006/main">
               <a:ext uri="{FF2B5EF4-FFF2-40B4-BE49-F238E27FC236}">
-                <a16:creationId xmlns:a16="http://schemas.microsoft.com/office/drawing/2014/main" id="{9BBB1736-4598-432A-9B43-1EF657BDBD24}"/>
+                <a16:creationId xmlns:a16="http://schemas.microsoft.com/office/drawing/2014/main" id="{31294E5D-9100-477A-8C48-FFE01E0E2E56}"/>
               </a:ext>
             </a:extLst>
           </p:cNvPr>
@@ -3821,7 +3821,7 @@
           <p:cNvPr id="12" name="">
             <a:extLst xmlns:a="http://schemas.openxmlformats.org/drawingml/2006/main">
               <a:ext uri="{FF2B5EF4-FFF2-40B4-BE49-F238E27FC236}">
-                <a16:creationId xmlns:a16="http://schemas.microsoft.com/office/drawing/2014/main" id="{A45FA955-FCCE-4E26-81AC-CFFABE1B0B54}"/>
+                <a16:creationId xmlns:a16="http://schemas.microsoft.com/office/drawing/2014/main" id="{E58D9119-6B08-4DAC-B10A-4EBBE6D5E06F}"/>
               </a:ext>
             </a:extLst>
           </p:cNvPr>
@@ -3878,7 +3878,7 @@
           <p:cNvPr id="13" name="">
             <a:extLst xmlns:a="http://schemas.openxmlformats.org/drawingml/2006/main">
               <a:ext uri="{FF2B5EF4-FFF2-40B4-BE49-F238E27FC236}">
-                <a16:creationId xmlns:a16="http://schemas.microsoft.com/office/drawing/2014/main" id="{A3765DBB-27A8-41EB-BE09-102AFF3EB184}"/>
+                <a16:creationId xmlns:a16="http://schemas.microsoft.com/office/drawing/2014/main" id="{83636B0C-7FD0-439A-ACC2-853BF216981D}"/>
               </a:ext>
             </a:extLst>
           </p:cNvPr>
@@ -3935,7 +3935,7 @@
           <p:cNvPr id="14" name="">
             <a:extLst xmlns:a="http://schemas.openxmlformats.org/drawingml/2006/main">
               <a:ext uri="{FF2B5EF4-FFF2-40B4-BE49-F238E27FC236}">
-                <a16:creationId xmlns:a16="http://schemas.microsoft.com/office/drawing/2014/main" id="{EC061D1F-504B-40B3-BBE7-8F8722FAE193}"/>
+                <a16:creationId xmlns:a16="http://schemas.microsoft.com/office/drawing/2014/main" id="{6AF582BC-F153-4384-A1F5-85C6F45CB1F6}"/>
               </a:ext>
             </a:extLst>
           </p:cNvPr>
@@ -3992,7 +3992,7 @@
           <p:cNvPr id="15" name="">
             <a:extLst xmlns:a="http://schemas.openxmlformats.org/drawingml/2006/main">
               <a:ext uri="{FF2B5EF4-FFF2-40B4-BE49-F238E27FC236}">
-                <a16:creationId xmlns:a16="http://schemas.microsoft.com/office/drawing/2014/main" id="{2F804238-6A07-434D-A808-F626631D8618}"/>
+                <a16:creationId xmlns:a16="http://schemas.microsoft.com/office/drawing/2014/main" id="{D60B53A7-A23B-442F-994D-E32901018957}"/>
               </a:ext>
             </a:extLst>
           </p:cNvPr>
@@ -4026,7 +4026,7 @@
           <p:cNvPr id="16" name="">
             <a:extLst xmlns:a="http://schemas.openxmlformats.org/drawingml/2006/main">
               <a:ext uri="{FF2B5EF4-FFF2-40B4-BE49-F238E27FC236}">
-                <a16:creationId xmlns:a16="http://schemas.microsoft.com/office/drawing/2014/main" id="{02FA6ACA-39AA-44E0-AE9B-E1F4616C1590}"/>
+                <a16:creationId xmlns:a16="http://schemas.microsoft.com/office/drawing/2014/main" id="{CB106300-658D-4569-B37C-1CE542F3EC76}"/>
               </a:ext>
             </a:extLst>
           </p:cNvPr>
@@ -4083,7 +4083,7 @@
           <p:cNvPr id="17" name="">
             <a:extLst xmlns:a="http://schemas.openxmlformats.org/drawingml/2006/main">
               <a:ext uri="{FF2B5EF4-FFF2-40B4-BE49-F238E27FC236}">
-                <a16:creationId xmlns:a16="http://schemas.microsoft.com/office/drawing/2014/main" id="{9F38295B-86A8-401E-96EC-C5C64DFA4B1E}"/>
+                <a16:creationId xmlns:a16="http://schemas.microsoft.com/office/drawing/2014/main" id="{BA9D81AB-59FB-47FC-9898-2D65598FDB29}"/>
               </a:ext>
             </a:extLst>
           </p:cNvPr>
@@ -4140,7 +4140,7 @@
           <p:cNvPr id="18" name="">
             <a:extLst xmlns:a="http://schemas.openxmlformats.org/drawingml/2006/main">
               <a:ext uri="{FF2B5EF4-FFF2-40B4-BE49-F238E27FC236}">
-                <a16:creationId xmlns:a16="http://schemas.microsoft.com/office/drawing/2014/main" id="{A1A555AD-46EB-4C3C-87BB-8AD91137F4AD}"/>
+                <a16:creationId xmlns:a16="http://schemas.microsoft.com/office/drawing/2014/main" id="{0C8C96C3-C56C-4792-9B68-4215FE937C25}"/>
               </a:ext>
             </a:extLst>
           </p:cNvPr>
@@ -4195,7 +4195,7 @@
     </p:spTree>
     <p:extLst>
       <p:ext uri="{BB962C8B-B14F-4D97-AF65-F5344CB8AC3E}">
-        <p14:creationId xmlns:p14="http://schemas.microsoft.com/office/powerpoint/2010/main" val="2089532495"/>
+        <p14:creationId xmlns:p14="http://schemas.microsoft.com/office/powerpoint/2010/main" val="780685322"/>
       </p:ext>
     </p:extLst>
   </p:cSld>
@@ -4350,7 +4350,7 @@
           <p:cNvPr id="23" name="">
             <a:extLst xmlns:a="http://schemas.openxmlformats.org/drawingml/2006/main">
               <a:ext uri="{FF2B5EF4-FFF2-40B4-BE49-F238E27FC236}">
-                <a16:creationId xmlns:a16="http://schemas.microsoft.com/office/drawing/2014/main" id="{61C2B6CD-AEB8-4221-B3DA-B60685010264}"/>
+                <a16:creationId xmlns:a16="http://schemas.microsoft.com/office/drawing/2014/main" id="{F8BD175A-CDEC-4EE6-9163-803CD23C054A}"/>
               </a:ext>
             </a:extLst>
           </p:cNvPr>
@@ -4382,7 +4382,7 @@
           <p:cNvPr id="2" name="">
             <a:extLst xmlns:a="http://schemas.openxmlformats.org/drawingml/2006/main">
               <a:ext uri="{FF2B5EF4-FFF2-40B4-BE49-F238E27FC236}">
-                <a16:creationId xmlns:a16="http://schemas.microsoft.com/office/drawing/2014/main" id="{CE8D44B5-1120-413B-AE9F-FDBE50FE316E}"/>
+                <a16:creationId xmlns:a16="http://schemas.microsoft.com/office/drawing/2014/main" id="{D81A3C9A-90DB-4862-8F34-BEF83DD91694}"/>
               </a:ext>
             </a:extLst>
           </p:cNvPr>
@@ -4439,7 +4439,7 @@
           <p:cNvPr id="3" name="">
             <a:extLst xmlns:a="http://schemas.openxmlformats.org/drawingml/2006/main">
               <a:ext uri="{FF2B5EF4-FFF2-40B4-BE49-F238E27FC236}">
-                <a16:creationId xmlns:a16="http://schemas.microsoft.com/office/drawing/2014/main" id="{A1171BDB-8B39-477B-A64C-42CF095054D4}"/>
+                <a16:creationId xmlns:a16="http://schemas.microsoft.com/office/drawing/2014/main" id="{459721D5-F1CC-407A-B0AE-5C03F28806BF}"/>
               </a:ext>
             </a:extLst>
           </p:cNvPr>
@@ -4471,7 +4471,7 @@
           <p:cNvPr id="4" name="">
             <a:extLst xmlns:a="http://schemas.openxmlformats.org/drawingml/2006/main">
               <a:ext uri="{FF2B5EF4-FFF2-40B4-BE49-F238E27FC236}">
-                <a16:creationId xmlns:a16="http://schemas.microsoft.com/office/drawing/2014/main" id="{7F82BCBD-F08D-410F-9070-AB6DDCDEC622}"/>
+                <a16:creationId xmlns:a16="http://schemas.microsoft.com/office/drawing/2014/main" id="{BB809399-A34D-408C-9F88-A1A3217C35D0}"/>
               </a:ext>
             </a:extLst>
           </p:cNvPr>
@@ -4528,7 +4528,7 @@
           <p:cNvPr id="5" name="">
             <a:extLst xmlns:a="http://schemas.openxmlformats.org/drawingml/2006/main">
               <a:ext uri="{FF2B5EF4-FFF2-40B4-BE49-F238E27FC236}">
-                <a16:creationId xmlns:a16="http://schemas.microsoft.com/office/drawing/2014/main" id="{C7CE347E-FDD5-4850-8A7F-D4A9963C4787}"/>
+                <a16:creationId xmlns:a16="http://schemas.microsoft.com/office/drawing/2014/main" id="{7686C106-01FD-45AD-8881-8842D6CCE5A8}"/>
               </a:ext>
             </a:extLst>
           </p:cNvPr>
@@ -4585,7 +4585,7 @@
           <p:cNvPr id="6" name="">
             <a:extLst xmlns:a="http://schemas.openxmlformats.org/drawingml/2006/main">
               <a:ext uri="{FF2B5EF4-FFF2-40B4-BE49-F238E27FC236}">
-                <a16:creationId xmlns:a16="http://schemas.microsoft.com/office/drawing/2014/main" id="{ECFD8996-959B-412D-B035-F331F2CB9073}"/>
+                <a16:creationId xmlns:a16="http://schemas.microsoft.com/office/drawing/2014/main" id="{F6B587C1-63A2-46B3-891F-F0DFB7D902A4}"/>
               </a:ext>
             </a:extLst>
           </p:cNvPr>
@@ -4642,7 +4642,7 @@
           <p:cNvPr id="7" name="">
             <a:extLst xmlns:a="http://schemas.openxmlformats.org/drawingml/2006/main">
               <a:ext uri="{FF2B5EF4-FFF2-40B4-BE49-F238E27FC236}">
-                <a16:creationId xmlns:a16="http://schemas.microsoft.com/office/drawing/2014/main" id="{0B5D1768-45AE-4864-B300-D6315CA54C6E}"/>
+                <a16:creationId xmlns:a16="http://schemas.microsoft.com/office/drawing/2014/main" id="{82EC12A7-BF7B-49EC-BD83-289B833BB7B6}"/>
               </a:ext>
             </a:extLst>
           </p:cNvPr>
@@ -4674,7 +4674,7 @@
           <p:cNvPr id="8" name="">
             <a:extLst xmlns:a="http://schemas.openxmlformats.org/drawingml/2006/main">
               <a:ext uri="{FF2B5EF4-FFF2-40B4-BE49-F238E27FC236}">
-                <a16:creationId xmlns:a16="http://schemas.microsoft.com/office/drawing/2014/main" id="{FB00517C-0796-478C-97E2-BA70CF307BEF}"/>
+                <a16:creationId xmlns:a16="http://schemas.microsoft.com/office/drawing/2014/main" id="{BD4060C4-F43F-48B0-A768-D93010609C51}"/>
               </a:ext>
             </a:extLst>
           </p:cNvPr>
@@ -4731,7 +4731,7 @@
           <p:cNvPr id="9" name="">
             <a:extLst xmlns:a="http://schemas.openxmlformats.org/drawingml/2006/main">
               <a:ext uri="{FF2B5EF4-FFF2-40B4-BE49-F238E27FC236}">
-                <a16:creationId xmlns:a16="http://schemas.microsoft.com/office/drawing/2014/main" id="{5A3BC3CB-CD9C-44EA-8D55-BADF5C69CEFA}"/>
+                <a16:creationId xmlns:a16="http://schemas.microsoft.com/office/drawing/2014/main" id="{4123C57F-944D-46E2-9873-395CB32DC9E3}"/>
               </a:ext>
             </a:extLst>
           </p:cNvPr>
@@ -4788,7 +4788,7 @@
           <p:cNvPr id="10" name="">
             <a:extLst xmlns:a="http://schemas.openxmlformats.org/drawingml/2006/main">
               <a:ext uri="{FF2B5EF4-FFF2-40B4-BE49-F238E27FC236}">
-                <a16:creationId xmlns:a16="http://schemas.microsoft.com/office/drawing/2014/main" id="{D6AADE7A-08C9-4AFD-BFF3-126DC1BFEEB6}"/>
+                <a16:creationId xmlns:a16="http://schemas.microsoft.com/office/drawing/2014/main" id="{655CA0C8-E8C1-4944-BDDF-646B6DC75DCE}"/>
               </a:ext>
             </a:extLst>
           </p:cNvPr>
@@ -4822,7 +4822,7 @@
           <p:cNvPr id="11" name="">
             <a:extLst xmlns:a="http://schemas.openxmlformats.org/drawingml/2006/main">
               <a:ext uri="{FF2B5EF4-FFF2-40B4-BE49-F238E27FC236}">
-                <a16:creationId xmlns:a16="http://schemas.microsoft.com/office/drawing/2014/main" id="{86AEF879-C7F6-4C38-9895-9D01F6A4419C}"/>
+                <a16:creationId xmlns:a16="http://schemas.microsoft.com/office/drawing/2014/main" id="{F01CFF33-E89C-4A41-804F-78C5861499D4}"/>
               </a:ext>
             </a:extLst>
           </p:cNvPr>
@@ -4854,7 +4854,7 @@
           <p:cNvPr id="12" name="">
             <a:extLst xmlns:a="http://schemas.openxmlformats.org/drawingml/2006/main">
               <a:ext uri="{FF2B5EF4-FFF2-40B4-BE49-F238E27FC236}">
-                <a16:creationId xmlns:a16="http://schemas.microsoft.com/office/drawing/2014/main" id="{0143C210-CEE9-4CD6-9047-E6CEB900DBBF}"/>
+                <a16:creationId xmlns:a16="http://schemas.microsoft.com/office/drawing/2014/main" id="{4FD9D85A-A9BD-4734-9668-A9D7812A06C3}"/>
               </a:ext>
             </a:extLst>
           </p:cNvPr>
@@ -4911,7 +4911,7 @@
           <p:cNvPr id="13" name="">
             <a:extLst xmlns:a="http://schemas.openxmlformats.org/drawingml/2006/main">
               <a:ext uri="{FF2B5EF4-FFF2-40B4-BE49-F238E27FC236}">
-                <a16:creationId xmlns:a16="http://schemas.microsoft.com/office/drawing/2014/main" id="{A4D01FE4-F8F4-4A08-8A2F-D83F74D8B227}"/>
+                <a16:creationId xmlns:a16="http://schemas.microsoft.com/office/drawing/2014/main" id="{1B667E0E-28FC-4CB2-BF8A-DB6DD5CC378A}"/>
               </a:ext>
             </a:extLst>
           </p:cNvPr>
@@ -4968,7 +4968,7 @@
           <p:cNvPr id="14" name="">
             <a:extLst xmlns:a="http://schemas.openxmlformats.org/drawingml/2006/main">
               <a:ext uri="{FF2B5EF4-FFF2-40B4-BE49-F238E27FC236}">
-                <a16:creationId xmlns:a16="http://schemas.microsoft.com/office/drawing/2014/main" id="{DA61FF3B-09A6-43B9-A012-33B5C4FEEE32}"/>
+                <a16:creationId xmlns:a16="http://schemas.microsoft.com/office/drawing/2014/main" id="{7F82ECC6-1508-4A10-B8A5-3D08711813A6}"/>
               </a:ext>
             </a:extLst>
           </p:cNvPr>
@@ -5002,7 +5002,7 @@
           <p:cNvPr id="15" name="">
             <a:extLst xmlns:a="http://schemas.openxmlformats.org/drawingml/2006/main">
               <a:ext uri="{FF2B5EF4-FFF2-40B4-BE49-F238E27FC236}">
-                <a16:creationId xmlns:a16="http://schemas.microsoft.com/office/drawing/2014/main" id="{BC1850D3-1556-42A2-BD2D-1E065D74F354}"/>
+                <a16:creationId xmlns:a16="http://schemas.microsoft.com/office/drawing/2014/main" id="{1818C368-961D-4FB2-9644-5D3F7027356A}"/>
               </a:ext>
             </a:extLst>
           </p:cNvPr>
@@ -5034,7 +5034,7 @@
           <p:cNvPr id="16" name="">
             <a:extLst xmlns:a="http://schemas.openxmlformats.org/drawingml/2006/main">
               <a:ext uri="{FF2B5EF4-FFF2-40B4-BE49-F238E27FC236}">
-                <a16:creationId xmlns:a16="http://schemas.microsoft.com/office/drawing/2014/main" id="{8236F342-947A-4002-AD5E-4C3B4B932F54}"/>
+                <a16:creationId xmlns:a16="http://schemas.microsoft.com/office/drawing/2014/main" id="{799ECC2C-F9C4-4086-87EF-C6302188EBD6}"/>
               </a:ext>
             </a:extLst>
           </p:cNvPr>
@@ -5091,7 +5091,7 @@
           <p:cNvPr id="17" name="">
             <a:extLst xmlns:a="http://schemas.openxmlformats.org/drawingml/2006/main">
               <a:ext uri="{FF2B5EF4-FFF2-40B4-BE49-F238E27FC236}">
-                <a16:creationId xmlns:a16="http://schemas.microsoft.com/office/drawing/2014/main" id="{9A542B75-8ACC-4CD9-91C9-8BF82FAA5658}"/>
+                <a16:creationId xmlns:a16="http://schemas.microsoft.com/office/drawing/2014/main" id="{4BF85125-CC1A-4C34-B88F-33C82CF7826F}"/>
               </a:ext>
             </a:extLst>
           </p:cNvPr>
@@ -5148,7 +5148,7 @@
           <p:cNvPr id="18" name="">
             <a:extLst xmlns:a="http://schemas.openxmlformats.org/drawingml/2006/main">
               <a:ext uri="{FF2B5EF4-FFF2-40B4-BE49-F238E27FC236}">
-                <a16:creationId xmlns:a16="http://schemas.microsoft.com/office/drawing/2014/main" id="{F2C08036-59E4-4DFF-B5E7-6D3B9A5AD840}"/>
+                <a16:creationId xmlns:a16="http://schemas.microsoft.com/office/drawing/2014/main" id="{E6BFD692-BD5B-45A3-8749-8987E2C589FB}"/>
               </a:ext>
             </a:extLst>
           </p:cNvPr>
@@ -5182,7 +5182,7 @@
           <p:cNvPr id="19" name="">
             <a:extLst xmlns:a="http://schemas.openxmlformats.org/drawingml/2006/main">
               <a:ext uri="{FF2B5EF4-FFF2-40B4-BE49-F238E27FC236}">
-                <a16:creationId xmlns:a16="http://schemas.microsoft.com/office/drawing/2014/main" id="{0F747AC0-C0CC-4962-969E-34239A0317D1}"/>
+                <a16:creationId xmlns:a16="http://schemas.microsoft.com/office/drawing/2014/main" id="{AF1763D2-3F6A-4EB4-BE0F-6E2C92A84F92}"/>
               </a:ext>
             </a:extLst>
           </p:cNvPr>
@@ -5214,7 +5214,7 @@
           <p:cNvPr id="20" name="">
             <a:extLst xmlns:a="http://schemas.openxmlformats.org/drawingml/2006/main">
               <a:ext uri="{FF2B5EF4-FFF2-40B4-BE49-F238E27FC236}">
-                <a16:creationId xmlns:a16="http://schemas.microsoft.com/office/drawing/2014/main" id="{81A178A4-6C0E-4848-846C-CAFC0A89C437}"/>
+                <a16:creationId xmlns:a16="http://schemas.microsoft.com/office/drawing/2014/main" id="{587BEEAF-E1E0-4EA5-B6E3-330572EEA19B}"/>
               </a:ext>
             </a:extLst>
           </p:cNvPr>
@@ -5271,7 +5271,7 @@
           <p:cNvPr id="21" name="">
             <a:extLst xmlns:a="http://schemas.openxmlformats.org/drawingml/2006/main">
               <a:ext uri="{FF2B5EF4-FFF2-40B4-BE49-F238E27FC236}">
-                <a16:creationId xmlns:a16="http://schemas.microsoft.com/office/drawing/2014/main" id="{058E0F4B-EC3D-4E70-A61D-A5ECA49CB2AC}"/>
+                <a16:creationId xmlns:a16="http://schemas.microsoft.com/office/drawing/2014/main" id="{38930C77-E85E-4645-AF97-306321E9A67C}"/>
               </a:ext>
             </a:extLst>
           </p:cNvPr>
@@ -5328,7 +5328,7 @@
           <p:cNvPr id="22" name="">
             <a:extLst xmlns:a="http://schemas.openxmlformats.org/drawingml/2006/main">
               <a:ext uri="{FF2B5EF4-FFF2-40B4-BE49-F238E27FC236}">
-                <a16:creationId xmlns:a16="http://schemas.microsoft.com/office/drawing/2014/main" id="{EA837570-BD33-449A-8106-CA2D43DBDCD9}"/>
+                <a16:creationId xmlns:a16="http://schemas.microsoft.com/office/drawing/2014/main" id="{55C23229-2B60-48FB-824A-F1FC2B9BA058}"/>
               </a:ext>
             </a:extLst>
           </p:cNvPr>
@@ -5383,7 +5383,7 @@
     </p:spTree>
     <p:extLst>
       <p:ext uri="{BB962C8B-B14F-4D97-AF65-F5344CB8AC3E}">
-        <p14:creationId xmlns:p14="http://schemas.microsoft.com/office/powerpoint/2010/main" val="637823861"/>
+        <p14:creationId xmlns:p14="http://schemas.microsoft.com/office/powerpoint/2010/main" val="620575433"/>
       </p:ext>
     </p:extLst>
   </p:cSld>
@@ -5584,7 +5584,7 @@
           <p:cNvPr id="23" name="">
             <a:extLst xmlns:a="http://schemas.openxmlformats.org/drawingml/2006/main">
               <a:ext uri="{FF2B5EF4-FFF2-40B4-BE49-F238E27FC236}">
-                <a16:creationId xmlns:a16="http://schemas.microsoft.com/office/drawing/2014/main" id="{22B5A5B0-D607-4379-91DD-BEFD0A7A5AEA}"/>
+                <a16:creationId xmlns:a16="http://schemas.microsoft.com/office/drawing/2014/main" id="{C4183012-C4DA-4344-A4C1-C879AB43592E}"/>
               </a:ext>
             </a:extLst>
           </p:cNvPr>
@@ -5616,7 +5616,7 @@
           <p:cNvPr id="2" name="">
             <a:extLst xmlns:a="http://schemas.openxmlformats.org/drawingml/2006/main">
               <a:ext uri="{FF2B5EF4-FFF2-40B4-BE49-F238E27FC236}">
-                <a16:creationId xmlns:a16="http://schemas.microsoft.com/office/drawing/2014/main" id="{3E9738D0-492F-4319-A2AD-C72B4254F614}"/>
+                <a16:creationId xmlns:a16="http://schemas.microsoft.com/office/drawing/2014/main" id="{7444981F-8B45-4FA9-9279-0B773FA5F920}"/>
               </a:ext>
             </a:extLst>
           </p:cNvPr>
@@ -5673,7 +5673,7 @@
           <p:cNvPr id="3" name="">
             <a:extLst xmlns:a="http://schemas.openxmlformats.org/drawingml/2006/main">
               <a:ext uri="{FF2B5EF4-FFF2-40B4-BE49-F238E27FC236}">
-                <a16:creationId xmlns:a16="http://schemas.microsoft.com/office/drawing/2014/main" id="{3B1A36C4-465A-4278-91B4-F30B264A5058}"/>
+                <a16:creationId xmlns:a16="http://schemas.microsoft.com/office/drawing/2014/main" id="{8D473834-4029-4722-A78E-75846FDDA6F4}"/>
               </a:ext>
             </a:extLst>
           </p:cNvPr>
@@ -5705,7 +5705,7 @@
           <p:cNvPr id="4" name="">
             <a:extLst xmlns:a="http://schemas.openxmlformats.org/drawingml/2006/main">
               <a:ext uri="{FF2B5EF4-FFF2-40B4-BE49-F238E27FC236}">
-                <a16:creationId xmlns:a16="http://schemas.microsoft.com/office/drawing/2014/main" id="{B185DF56-DBF0-49EC-B8F1-C98169AB1F7F}"/>
+                <a16:creationId xmlns:a16="http://schemas.microsoft.com/office/drawing/2014/main" id="{DA2C90EC-EE5A-4D8D-8758-4CFE0C71596A}"/>
               </a:ext>
             </a:extLst>
           </p:cNvPr>
@@ -5762,7 +5762,7 @@
           <p:cNvPr id="5" name="">
             <a:extLst xmlns:a="http://schemas.openxmlformats.org/drawingml/2006/main">
               <a:ext uri="{FF2B5EF4-FFF2-40B4-BE49-F238E27FC236}">
-                <a16:creationId xmlns:a16="http://schemas.microsoft.com/office/drawing/2014/main" id="{EE01358D-A363-460F-8AC7-0F28E0FF0680}"/>
+                <a16:creationId xmlns:a16="http://schemas.microsoft.com/office/drawing/2014/main" id="{E4CFD30D-1525-4748-A5D9-B9112323C591}"/>
               </a:ext>
             </a:extLst>
           </p:cNvPr>
@@ -5819,7 +5819,7 @@
           <p:cNvPr id="6" name="">
             <a:extLst xmlns:a="http://schemas.openxmlformats.org/drawingml/2006/main">
               <a:ext uri="{FF2B5EF4-FFF2-40B4-BE49-F238E27FC236}">
-                <a16:creationId xmlns:a16="http://schemas.microsoft.com/office/drawing/2014/main" id="{60E86E98-072E-4073-8CF3-605A562F19AB}"/>
+                <a16:creationId xmlns:a16="http://schemas.microsoft.com/office/drawing/2014/main" id="{E125203C-6CEE-4651-B1B5-E24ADDF28FBA}"/>
               </a:ext>
             </a:extLst>
           </p:cNvPr>
@@ -5876,7 +5876,7 @@
           <p:cNvPr id="7" name="">
             <a:extLst xmlns:a="http://schemas.openxmlformats.org/drawingml/2006/main">
               <a:ext uri="{FF2B5EF4-FFF2-40B4-BE49-F238E27FC236}">
-                <a16:creationId xmlns:a16="http://schemas.microsoft.com/office/drawing/2014/main" id="{C28A066A-53DA-4433-9F31-0EFD6551CD31}"/>
+                <a16:creationId xmlns:a16="http://schemas.microsoft.com/office/drawing/2014/main" id="{373AE9E5-D94F-467E-A374-826AF04809AA}"/>
               </a:ext>
             </a:extLst>
           </p:cNvPr>
@@ -5908,7 +5908,7 @@
           <p:cNvPr id="8" name="">
             <a:extLst xmlns:a="http://schemas.openxmlformats.org/drawingml/2006/main">
               <a:ext uri="{FF2B5EF4-FFF2-40B4-BE49-F238E27FC236}">
-                <a16:creationId xmlns:a16="http://schemas.microsoft.com/office/drawing/2014/main" id="{071CD145-E235-4D47-BCB8-81AA73189C5D}"/>
+                <a16:creationId xmlns:a16="http://schemas.microsoft.com/office/drawing/2014/main" id="{3EC36EF0-EA99-4A2A-BC1B-E764F9AB7297}"/>
               </a:ext>
             </a:extLst>
           </p:cNvPr>
@@ -5965,7 +5965,7 @@
           <p:cNvPr id="9" name="">
             <a:extLst xmlns:a="http://schemas.openxmlformats.org/drawingml/2006/main">
               <a:ext uri="{FF2B5EF4-FFF2-40B4-BE49-F238E27FC236}">
-                <a16:creationId xmlns:a16="http://schemas.microsoft.com/office/drawing/2014/main" id="{F7D4B1D4-8BCF-4E04-ADDD-1CF4557CD1A1}"/>
+                <a16:creationId xmlns:a16="http://schemas.microsoft.com/office/drawing/2014/main" id="{74EF1920-62E7-48E2-A1A9-8CEA91BA41CB}"/>
               </a:ext>
             </a:extLst>
           </p:cNvPr>
@@ -6022,7 +6022,7 @@
           <p:cNvPr id="10" name="">
             <a:extLst xmlns:a="http://schemas.openxmlformats.org/drawingml/2006/main">
               <a:ext uri="{FF2B5EF4-FFF2-40B4-BE49-F238E27FC236}">
-                <a16:creationId xmlns:a16="http://schemas.microsoft.com/office/drawing/2014/main" id="{0C8A4421-1ACA-4F2C-A9BD-76AC9FBC057A}"/>
+                <a16:creationId xmlns:a16="http://schemas.microsoft.com/office/drawing/2014/main" id="{6D7BE910-651E-4874-8D33-453FF2D7A827}"/>
               </a:ext>
             </a:extLst>
           </p:cNvPr>
@@ -6056,7 +6056,7 @@
           <p:cNvPr id="11" name="">
             <a:extLst xmlns:a="http://schemas.openxmlformats.org/drawingml/2006/main">
               <a:ext uri="{FF2B5EF4-FFF2-40B4-BE49-F238E27FC236}">
-                <a16:creationId xmlns:a16="http://schemas.microsoft.com/office/drawing/2014/main" id="{2C976EE9-5B45-48D6-8049-110D13D2F2E0}"/>
+                <a16:creationId xmlns:a16="http://schemas.microsoft.com/office/drawing/2014/main" id="{09B558E8-D516-4C13-8EEE-C0EE872E3647}"/>
               </a:ext>
             </a:extLst>
           </p:cNvPr>
@@ -6088,7 +6088,7 @@
           <p:cNvPr id="12" name="">
             <a:extLst xmlns:a="http://schemas.openxmlformats.org/drawingml/2006/main">
               <a:ext uri="{FF2B5EF4-FFF2-40B4-BE49-F238E27FC236}">
-                <a16:creationId xmlns:a16="http://schemas.microsoft.com/office/drawing/2014/main" id="{E6BBAE0F-81E9-4E3C-A212-52B5C6068FCF}"/>
+                <a16:creationId xmlns:a16="http://schemas.microsoft.com/office/drawing/2014/main" id="{8EBFE855-58C4-442C-B844-A562F1D3CA01}"/>
               </a:ext>
             </a:extLst>
           </p:cNvPr>
@@ -6145,7 +6145,7 @@
           <p:cNvPr id="13" name="">
             <a:extLst xmlns:a="http://schemas.openxmlformats.org/drawingml/2006/main">
               <a:ext uri="{FF2B5EF4-FFF2-40B4-BE49-F238E27FC236}">
-                <a16:creationId xmlns:a16="http://schemas.microsoft.com/office/drawing/2014/main" id="{244790D6-46B1-42E4-BAF7-D6F50D5627EE}"/>
+                <a16:creationId xmlns:a16="http://schemas.microsoft.com/office/drawing/2014/main" id="{B20F09FB-0CB3-4E6F-A209-46A853DBA3ED}"/>
               </a:ext>
             </a:extLst>
           </p:cNvPr>
@@ -6202,7 +6202,7 @@
           <p:cNvPr id="14" name="">
             <a:extLst xmlns:a="http://schemas.openxmlformats.org/drawingml/2006/main">
               <a:ext uri="{FF2B5EF4-FFF2-40B4-BE49-F238E27FC236}">
-                <a16:creationId xmlns:a16="http://schemas.microsoft.com/office/drawing/2014/main" id="{941E4EC5-D6B4-4525-96FE-6D1C6037356A}"/>
+                <a16:creationId xmlns:a16="http://schemas.microsoft.com/office/drawing/2014/main" id="{2A15D51F-888C-4D30-BE62-0C662FBA74FF}"/>
               </a:ext>
             </a:extLst>
           </p:cNvPr>
@@ -6236,7 +6236,7 @@
           <p:cNvPr id="15" name="">
             <a:extLst xmlns:a="http://schemas.openxmlformats.org/drawingml/2006/main">
               <a:ext uri="{FF2B5EF4-FFF2-40B4-BE49-F238E27FC236}">
-                <a16:creationId xmlns:a16="http://schemas.microsoft.com/office/drawing/2014/main" id="{B131E46F-FC1B-47D7-BC34-3576724367CD}"/>
+                <a16:creationId xmlns:a16="http://schemas.microsoft.com/office/drawing/2014/main" id="{4EE9DFB9-11B1-4900-8CDE-EBC480EA985C}"/>
               </a:ext>
             </a:extLst>
           </p:cNvPr>
@@ -6268,7 +6268,7 @@
           <p:cNvPr id="16" name="">
             <a:extLst xmlns:a="http://schemas.openxmlformats.org/drawingml/2006/main">
               <a:ext uri="{FF2B5EF4-FFF2-40B4-BE49-F238E27FC236}">
-                <a16:creationId xmlns:a16="http://schemas.microsoft.com/office/drawing/2014/main" id="{73ADD75E-BB9A-497C-B012-C84B4433727D}"/>
+                <a16:creationId xmlns:a16="http://schemas.microsoft.com/office/drawing/2014/main" id="{068F2406-3D67-4A02-B569-875623675A87}"/>
               </a:ext>
             </a:extLst>
           </p:cNvPr>
@@ -6325,7 +6325,7 @@
           <p:cNvPr id="17" name="">
             <a:extLst xmlns:a="http://schemas.openxmlformats.org/drawingml/2006/main">
               <a:ext uri="{FF2B5EF4-FFF2-40B4-BE49-F238E27FC236}">
-                <a16:creationId xmlns:a16="http://schemas.microsoft.com/office/drawing/2014/main" id="{CB8A0231-756B-4927-AF8A-E9182955A92F}"/>
+                <a16:creationId xmlns:a16="http://schemas.microsoft.com/office/drawing/2014/main" id="{11783E4B-D8AE-4B25-8B8C-FB5E593204F0}"/>
               </a:ext>
             </a:extLst>
           </p:cNvPr>
@@ -6382,7 +6382,7 @@
           <p:cNvPr id="18" name="">
             <a:extLst xmlns:a="http://schemas.openxmlformats.org/drawingml/2006/main">
               <a:ext uri="{FF2B5EF4-FFF2-40B4-BE49-F238E27FC236}">
-                <a16:creationId xmlns:a16="http://schemas.microsoft.com/office/drawing/2014/main" id="{31BA07E4-E76B-408B-BE6B-FC47FF4E4BC0}"/>
+                <a16:creationId xmlns:a16="http://schemas.microsoft.com/office/drawing/2014/main" id="{7EB3862E-B2D3-4D1E-BD08-06AC1DD82582}"/>
               </a:ext>
             </a:extLst>
           </p:cNvPr>
@@ -6416,7 +6416,7 @@
           <p:cNvPr id="19" name="">
             <a:extLst xmlns:a="http://schemas.openxmlformats.org/drawingml/2006/main">
               <a:ext uri="{FF2B5EF4-FFF2-40B4-BE49-F238E27FC236}">
-                <a16:creationId xmlns:a16="http://schemas.microsoft.com/office/drawing/2014/main" id="{4EE8D45F-677E-4D88-AF17-FBFD78B4F434}"/>
+                <a16:creationId xmlns:a16="http://schemas.microsoft.com/office/drawing/2014/main" id="{67CE7C10-17CC-49DB-A4AB-AEEE9BC11C7E}"/>
               </a:ext>
             </a:extLst>
           </p:cNvPr>
@@ -6448,7 +6448,7 @@
           <p:cNvPr id="20" name="">
             <a:extLst xmlns:a="http://schemas.openxmlformats.org/drawingml/2006/main">
               <a:ext uri="{FF2B5EF4-FFF2-40B4-BE49-F238E27FC236}">
-                <a16:creationId xmlns:a16="http://schemas.microsoft.com/office/drawing/2014/main" id="{E9140C07-DACD-481D-A3CD-1968C429007F}"/>
+                <a16:creationId xmlns:a16="http://schemas.microsoft.com/office/drawing/2014/main" id="{25DC2B5F-71F8-49D7-851B-6673A5C3B732}"/>
               </a:ext>
             </a:extLst>
           </p:cNvPr>
@@ -6505,7 +6505,7 @@
           <p:cNvPr id="21" name="">
             <a:extLst xmlns:a="http://schemas.openxmlformats.org/drawingml/2006/main">
               <a:ext uri="{FF2B5EF4-FFF2-40B4-BE49-F238E27FC236}">
-                <a16:creationId xmlns:a16="http://schemas.microsoft.com/office/drawing/2014/main" id="{B730F948-83EA-4832-B63C-76858DB7C08B}"/>
+                <a16:creationId xmlns:a16="http://schemas.microsoft.com/office/drawing/2014/main" id="{42475A26-D5BE-4502-9610-F1FA296A97B6}"/>
               </a:ext>
             </a:extLst>
           </p:cNvPr>
@@ -6562,7 +6562,7 @@
           <p:cNvPr id="22" name="">
             <a:extLst xmlns:a="http://schemas.openxmlformats.org/drawingml/2006/main">
               <a:ext uri="{FF2B5EF4-FFF2-40B4-BE49-F238E27FC236}">
-                <a16:creationId xmlns:a16="http://schemas.microsoft.com/office/drawing/2014/main" id="{443F8167-51AF-4382-9AEF-3E51B7730B58}"/>
+                <a16:creationId xmlns:a16="http://schemas.microsoft.com/office/drawing/2014/main" id="{F7B2B356-8397-41AB-9B76-2FCFB6317ED3}"/>
               </a:ext>
             </a:extLst>
           </p:cNvPr>
@@ -6617,7 +6617,7 @@
     </p:spTree>
     <p:extLst>
       <p:ext uri="{BB962C8B-B14F-4D97-AF65-F5344CB8AC3E}">
-        <p14:creationId xmlns:p14="http://schemas.microsoft.com/office/powerpoint/2010/main" val="1788855143"/>
+        <p14:creationId xmlns:p14="http://schemas.microsoft.com/office/powerpoint/2010/main" val="900913871"/>
       </p:ext>
     </p:extLst>
   </p:cSld>
@@ -6818,7 +6818,7 @@
           <p:cNvPr id="16" name="">
             <a:extLst xmlns:a="http://schemas.openxmlformats.org/drawingml/2006/main">
               <a:ext uri="{FF2B5EF4-FFF2-40B4-BE49-F238E27FC236}">
-                <a16:creationId xmlns:a16="http://schemas.microsoft.com/office/drawing/2014/main" id="{D5253510-4AF2-46AC-9D09-87DFAA48B6F6}"/>
+                <a16:creationId xmlns:a16="http://schemas.microsoft.com/office/drawing/2014/main" id="{B7A7A76E-AECB-4C73-8204-8ED4D2BA5795}"/>
               </a:ext>
             </a:extLst>
           </p:cNvPr>
@@ -6850,7 +6850,7 @@
           <p:cNvPr id="2" name="">
             <a:extLst xmlns:a="http://schemas.openxmlformats.org/drawingml/2006/main">
               <a:ext uri="{FF2B5EF4-FFF2-40B4-BE49-F238E27FC236}">
-                <a16:creationId xmlns:a16="http://schemas.microsoft.com/office/drawing/2014/main" id="{18658555-0B46-4EB0-A079-21F0FF6D728E}"/>
+                <a16:creationId xmlns:a16="http://schemas.microsoft.com/office/drawing/2014/main" id="{97FBC1CA-7821-4737-AB91-FC4A1109FAA1}"/>
               </a:ext>
             </a:extLst>
           </p:cNvPr>
@@ -6907,7 +6907,7 @@
           <p:cNvPr id="3" name="">
             <a:extLst xmlns:a="http://schemas.openxmlformats.org/drawingml/2006/main">
               <a:ext uri="{FF2B5EF4-FFF2-40B4-BE49-F238E27FC236}">
-                <a16:creationId xmlns:a16="http://schemas.microsoft.com/office/drawing/2014/main" id="{141ACAC0-0554-4440-892B-8CFD22F4E189}"/>
+                <a16:creationId xmlns:a16="http://schemas.microsoft.com/office/drawing/2014/main" id="{49A16703-F6A7-4095-9B98-7B8DBAA14A2B}"/>
               </a:ext>
             </a:extLst>
           </p:cNvPr>
@@ -6939,7 +6939,7 @@
           <p:cNvPr id="4" name="">
             <a:extLst xmlns:a="http://schemas.openxmlformats.org/drawingml/2006/main">
               <a:ext uri="{FF2B5EF4-FFF2-40B4-BE49-F238E27FC236}">
-                <a16:creationId xmlns:a16="http://schemas.microsoft.com/office/drawing/2014/main" id="{2938FDC6-5053-4E20-887E-00321EF64EE2}"/>
+                <a16:creationId xmlns:a16="http://schemas.microsoft.com/office/drawing/2014/main" id="{9A0E44D7-5C89-4DDD-B4EE-8BBD013A493A}"/>
               </a:ext>
             </a:extLst>
           </p:cNvPr>
@@ -6996,7 +6996,7 @@
           <p:cNvPr id="5" name="">
             <a:extLst xmlns:a="http://schemas.openxmlformats.org/drawingml/2006/main">
               <a:ext uri="{FF2B5EF4-FFF2-40B4-BE49-F238E27FC236}">
-                <a16:creationId xmlns:a16="http://schemas.microsoft.com/office/drawing/2014/main" id="{FC82C56C-485A-47B3-BAAD-E521B42ED705}"/>
+                <a16:creationId xmlns:a16="http://schemas.microsoft.com/office/drawing/2014/main" id="{44A390FB-AC90-4276-8EBB-09E0B171FEB1}"/>
               </a:ext>
             </a:extLst>
           </p:cNvPr>
@@ -7053,7 +7053,7 @@
           <p:cNvPr id="6" name="">
             <a:extLst xmlns:a="http://schemas.openxmlformats.org/drawingml/2006/main">
               <a:ext uri="{FF2B5EF4-FFF2-40B4-BE49-F238E27FC236}">
-                <a16:creationId xmlns:a16="http://schemas.microsoft.com/office/drawing/2014/main" id="{0DDDECA2-81D4-4021-B75C-7D67828DC465}"/>
+                <a16:creationId xmlns:a16="http://schemas.microsoft.com/office/drawing/2014/main" id="{EF5FA8DA-151D-41B3-AF66-31816430E338}"/>
               </a:ext>
             </a:extLst>
           </p:cNvPr>
@@ -7110,7 +7110,7 @@
           <p:cNvPr id="7" name="">
             <a:extLst xmlns:a="http://schemas.openxmlformats.org/drawingml/2006/main">
               <a:ext uri="{FF2B5EF4-FFF2-40B4-BE49-F238E27FC236}">
-                <a16:creationId xmlns:a16="http://schemas.microsoft.com/office/drawing/2014/main" id="{0A75AB1A-F57C-4642-B09E-5B3754C0E441}"/>
+                <a16:creationId xmlns:a16="http://schemas.microsoft.com/office/drawing/2014/main" id="{6DAA797F-3618-4049-B940-767017E9B317}"/>
               </a:ext>
             </a:extLst>
           </p:cNvPr>
@@ -7142,7 +7142,7 @@
           <p:cNvPr id="8" name="">
             <a:extLst xmlns:a="http://schemas.openxmlformats.org/drawingml/2006/main">
               <a:ext uri="{FF2B5EF4-FFF2-40B4-BE49-F238E27FC236}">
-                <a16:creationId xmlns:a16="http://schemas.microsoft.com/office/drawing/2014/main" id="{A578E79D-6229-42E4-9FD1-3A431754C829}"/>
+                <a16:creationId xmlns:a16="http://schemas.microsoft.com/office/drawing/2014/main" id="{9448CC54-EA75-4DD2-9210-5C64354E0F80}"/>
               </a:ext>
             </a:extLst>
           </p:cNvPr>
@@ -7199,7 +7199,7 @@
           <p:cNvPr id="9" name="">
             <a:extLst xmlns:a="http://schemas.openxmlformats.org/drawingml/2006/main">
               <a:ext uri="{FF2B5EF4-FFF2-40B4-BE49-F238E27FC236}">
-                <a16:creationId xmlns:a16="http://schemas.microsoft.com/office/drawing/2014/main" id="{EC1AC241-15C7-4C39-899D-E172787DF121}"/>
+                <a16:creationId xmlns:a16="http://schemas.microsoft.com/office/drawing/2014/main" id="{C3DBB172-5BD8-4070-80E2-738754EE2223}"/>
               </a:ext>
             </a:extLst>
           </p:cNvPr>
@@ -7256,7 +7256,7 @@
           <p:cNvPr id="10" name="">
             <a:extLst xmlns:a="http://schemas.openxmlformats.org/drawingml/2006/main">
               <a:ext uri="{FF2B5EF4-FFF2-40B4-BE49-F238E27FC236}">
-                <a16:creationId xmlns:a16="http://schemas.microsoft.com/office/drawing/2014/main" id="{39AFE4C5-5B2D-408C-9AEB-57537E6AF6F2}"/>
+                <a16:creationId xmlns:a16="http://schemas.microsoft.com/office/drawing/2014/main" id="{397D7746-92CE-4EB3-9CC7-87E9B3A18B96}"/>
               </a:ext>
             </a:extLst>
           </p:cNvPr>
@@ -7313,7 +7313,7 @@
           <p:cNvPr id="11" name="">
             <a:extLst xmlns:a="http://schemas.openxmlformats.org/drawingml/2006/main">
               <a:ext uri="{FF2B5EF4-FFF2-40B4-BE49-F238E27FC236}">
-                <a16:creationId xmlns:a16="http://schemas.microsoft.com/office/drawing/2014/main" id="{7C0FC68C-6E79-4013-BB7C-EE1E9220C347}"/>
+                <a16:creationId xmlns:a16="http://schemas.microsoft.com/office/drawing/2014/main" id="{13103913-B638-43E3-9F8A-41DE21BC6E92}"/>
               </a:ext>
             </a:extLst>
           </p:cNvPr>
@@ -7345,7 +7345,7 @@
           <p:cNvPr id="12" name="">
             <a:extLst xmlns:a="http://schemas.openxmlformats.org/drawingml/2006/main">
               <a:ext uri="{FF2B5EF4-FFF2-40B4-BE49-F238E27FC236}">
-                <a16:creationId xmlns:a16="http://schemas.microsoft.com/office/drawing/2014/main" id="{0A92C85A-F75F-4E83-B309-07ACD935CAD2}"/>
+                <a16:creationId xmlns:a16="http://schemas.microsoft.com/office/drawing/2014/main" id="{8859DD76-725B-495E-BBD9-F608E5A3630C}"/>
               </a:ext>
             </a:extLst>
           </p:cNvPr>
@@ -7402,7 +7402,7 @@
           <p:cNvPr id="13" name="">
             <a:extLst xmlns:a="http://schemas.openxmlformats.org/drawingml/2006/main">
               <a:ext uri="{FF2B5EF4-FFF2-40B4-BE49-F238E27FC236}">
-                <a16:creationId xmlns:a16="http://schemas.microsoft.com/office/drawing/2014/main" id="{92CC85B9-EE71-45A3-A5A8-E0F329D2042B}"/>
+                <a16:creationId xmlns:a16="http://schemas.microsoft.com/office/drawing/2014/main" id="{4A21E661-4BA1-4EE6-9913-8039CB4F5ADD}"/>
               </a:ext>
             </a:extLst>
           </p:cNvPr>
@@ -7459,7 +7459,7 @@
           <p:cNvPr id="14" name="">
             <a:extLst xmlns:a="http://schemas.openxmlformats.org/drawingml/2006/main">
               <a:ext uri="{FF2B5EF4-FFF2-40B4-BE49-F238E27FC236}">
-                <a16:creationId xmlns:a16="http://schemas.microsoft.com/office/drawing/2014/main" id="{40224521-4282-47F7-82BB-4EA5C1B644FE}"/>
+                <a16:creationId xmlns:a16="http://schemas.microsoft.com/office/drawing/2014/main" id="{4CF5752B-EBC5-4327-958C-599F541F3E15}"/>
               </a:ext>
             </a:extLst>
           </p:cNvPr>
@@ -7516,7 +7516,7 @@
           <p:cNvPr id="15" name="">
             <a:extLst xmlns:a="http://schemas.openxmlformats.org/drawingml/2006/main">
               <a:ext uri="{FF2B5EF4-FFF2-40B4-BE49-F238E27FC236}">
-                <a16:creationId xmlns:a16="http://schemas.microsoft.com/office/drawing/2014/main" id="{2368A8BA-549A-497F-B92B-995DC47D4993}"/>
+                <a16:creationId xmlns:a16="http://schemas.microsoft.com/office/drawing/2014/main" id="{261FC6DF-CCEE-4843-AA00-AC241C0C8877}"/>
               </a:ext>
             </a:extLst>
           </p:cNvPr>
@@ -7571,7 +7571,7 @@
     </p:spTree>
     <p:extLst>
       <p:ext uri="{BB962C8B-B14F-4D97-AF65-F5344CB8AC3E}">
-        <p14:creationId xmlns:p14="http://schemas.microsoft.com/office/powerpoint/2010/main" val="158938391"/>
+        <p14:creationId xmlns:p14="http://schemas.microsoft.com/office/powerpoint/2010/main" val="194048918"/>
       </p:ext>
     </p:extLst>
   </p:cSld>
@@ -7772,7 +7772,7 @@
           <p:cNvPr id="23" name="">
             <a:extLst xmlns:a="http://schemas.openxmlformats.org/drawingml/2006/main">
               <a:ext uri="{FF2B5EF4-FFF2-40B4-BE49-F238E27FC236}">
-                <a16:creationId xmlns:a16="http://schemas.microsoft.com/office/drawing/2014/main" id="{6E4FA047-B0D3-4F85-8E20-B5A7E8D4493C}"/>
+                <a16:creationId xmlns:a16="http://schemas.microsoft.com/office/drawing/2014/main" id="{5C42D2B3-A8CB-4399-BFBD-7209AD905C04}"/>
               </a:ext>
             </a:extLst>
           </p:cNvPr>
@@ -7804,7 +7804,7 @@
           <p:cNvPr id="2" name="">
             <a:extLst xmlns:a="http://schemas.openxmlformats.org/drawingml/2006/main">
               <a:ext uri="{FF2B5EF4-FFF2-40B4-BE49-F238E27FC236}">
-                <a16:creationId xmlns:a16="http://schemas.microsoft.com/office/drawing/2014/main" id="{E84514E3-4FCE-4870-83CC-AEEEF09615C2}"/>
+                <a16:creationId xmlns:a16="http://schemas.microsoft.com/office/drawing/2014/main" id="{0BCA53B4-43C2-4CCA-90E8-9D91829862EF}"/>
               </a:ext>
             </a:extLst>
           </p:cNvPr>
@@ -7861,7 +7861,7 @@
           <p:cNvPr id="3" name="">
             <a:extLst xmlns:a="http://schemas.openxmlformats.org/drawingml/2006/main">
               <a:ext uri="{FF2B5EF4-FFF2-40B4-BE49-F238E27FC236}">
-                <a16:creationId xmlns:a16="http://schemas.microsoft.com/office/drawing/2014/main" id="{17A179D9-17DA-4600-BF96-D7BF1A6E5B55}"/>
+                <a16:creationId xmlns:a16="http://schemas.microsoft.com/office/drawing/2014/main" id="{58CA24DE-FC52-43F2-A863-D2F3C71E6A2A}"/>
               </a:ext>
             </a:extLst>
           </p:cNvPr>
@@ -7893,7 +7893,7 @@
           <p:cNvPr id="4" name="">
             <a:extLst xmlns:a="http://schemas.openxmlformats.org/drawingml/2006/main">
               <a:ext uri="{FF2B5EF4-FFF2-40B4-BE49-F238E27FC236}">
-                <a16:creationId xmlns:a16="http://schemas.microsoft.com/office/drawing/2014/main" id="{836E63B3-29A3-4DA7-BB1A-789164E231C1}"/>
+                <a16:creationId xmlns:a16="http://schemas.microsoft.com/office/drawing/2014/main" id="{E151B4C4-FD7F-4BD8-896F-7BC75C594681}"/>
               </a:ext>
             </a:extLst>
           </p:cNvPr>
@@ -7950,7 +7950,7 @@
           <p:cNvPr id="5" name="">
             <a:extLst xmlns:a="http://schemas.openxmlformats.org/drawingml/2006/main">
               <a:ext uri="{FF2B5EF4-FFF2-40B4-BE49-F238E27FC236}">
-                <a16:creationId xmlns:a16="http://schemas.microsoft.com/office/drawing/2014/main" id="{98C5639A-D676-43DE-9B71-91E8CB203854}"/>
+                <a16:creationId xmlns:a16="http://schemas.microsoft.com/office/drawing/2014/main" id="{EE6B94E4-51AD-465A-894B-26D2EFE2545A}"/>
               </a:ext>
             </a:extLst>
           </p:cNvPr>
@@ -8007,7 +8007,7 @@
           <p:cNvPr id="6" name="">
             <a:extLst xmlns:a="http://schemas.openxmlformats.org/drawingml/2006/main">
               <a:ext uri="{FF2B5EF4-FFF2-40B4-BE49-F238E27FC236}">
-                <a16:creationId xmlns:a16="http://schemas.microsoft.com/office/drawing/2014/main" id="{A6AECB2D-CF51-40DE-8BCA-9E2FAD6E2358}"/>
+                <a16:creationId xmlns:a16="http://schemas.microsoft.com/office/drawing/2014/main" id="{E3234FD3-15DD-4EF9-AC57-0BE3E0ECABB8}"/>
               </a:ext>
             </a:extLst>
           </p:cNvPr>
@@ -8064,7 +8064,7 @@
           <p:cNvPr id="7" name="">
             <a:extLst xmlns:a="http://schemas.openxmlformats.org/drawingml/2006/main">
               <a:ext uri="{FF2B5EF4-FFF2-40B4-BE49-F238E27FC236}">
-                <a16:creationId xmlns:a16="http://schemas.microsoft.com/office/drawing/2014/main" id="{B75DB612-0743-4F48-A635-8DEDEEDCEAA1}"/>
+                <a16:creationId xmlns:a16="http://schemas.microsoft.com/office/drawing/2014/main" id="{87281B26-3E8F-4A1B-A498-D82E726D64BD}"/>
               </a:ext>
             </a:extLst>
           </p:cNvPr>
@@ -8096,7 +8096,7 @@
           <p:cNvPr id="8" name="">
             <a:extLst xmlns:a="http://schemas.openxmlformats.org/drawingml/2006/main">
               <a:ext uri="{FF2B5EF4-FFF2-40B4-BE49-F238E27FC236}">
-                <a16:creationId xmlns:a16="http://schemas.microsoft.com/office/drawing/2014/main" id="{B8751530-FB38-4998-B6CE-57FBD136A4DE}"/>
+                <a16:creationId xmlns:a16="http://schemas.microsoft.com/office/drawing/2014/main" id="{AE49EE73-A584-4236-9BAC-F6F5CAF7FCD1}"/>
               </a:ext>
             </a:extLst>
           </p:cNvPr>
@@ -8153,7 +8153,7 @@
           <p:cNvPr id="9" name="">
             <a:extLst xmlns:a="http://schemas.openxmlformats.org/drawingml/2006/main">
               <a:ext uri="{FF2B5EF4-FFF2-40B4-BE49-F238E27FC236}">
-                <a16:creationId xmlns:a16="http://schemas.microsoft.com/office/drawing/2014/main" id="{CA39596B-7283-4547-A9EF-D43C865D45F5}"/>
+                <a16:creationId xmlns:a16="http://schemas.microsoft.com/office/drawing/2014/main" id="{418A965A-FAA8-45B4-B609-728FC764B314}"/>
               </a:ext>
             </a:extLst>
           </p:cNvPr>
@@ -8210,19 +8210,19 @@
           <p:cNvPr id="10" name="">
             <a:extLst xmlns:a="http://schemas.openxmlformats.org/drawingml/2006/main">
               <a:ext uri="{FF2B5EF4-FFF2-40B4-BE49-F238E27FC236}">
-                <a16:creationId xmlns:a16="http://schemas.microsoft.com/office/drawing/2014/main" id="{0809DFEB-2CC6-440C-8DF4-EC0ACE33213E}"/>
-              </a:ext>
-            </a:extLst>
-          </p:cNvPr>
-          <p:cNvSpPr>
-            <a:spLocks xmlns:a="http://schemas.openxmlformats.org/drawingml/2006/main" noGrp="1"/>
-          </p:cNvSpPr>
-          <p:nvPr/>
-        </p:nvSpPr>
-        <p:spPr>
-          <a:xfrm xmlns:a="http://schemas.openxmlformats.org/drawingml/2006/main">
-            <a:off x="914400" y="1257300"/>
-            <a:ext cx="10363200" cy="781050"/>
+                <a16:creationId xmlns:a16="http://schemas.microsoft.com/office/drawing/2014/main" id="{2AF6EC3E-AC47-499F-93C0-BE315BA31F68}"/>
+              </a:ext>
+            </a:extLst>
+          </p:cNvPr>
+          <p:cNvSpPr>
+            <a:spLocks xmlns:a="http://schemas.openxmlformats.org/drawingml/2006/main" noGrp="1"/>
+          </p:cNvSpPr>
+          <p:nvPr/>
+        </p:nvSpPr>
+        <p:spPr>
+          <a:xfrm xmlns:a="http://schemas.openxmlformats.org/drawingml/2006/main">
+            <a:off x="857250" y="1219200"/>
+            <a:ext cx="10477500" cy="742950"/>
           </a:xfrm>
           <a:prstGeom xmlns:a="http://schemas.openxmlformats.org/drawingml/2006/main" prst="rect">
             <a:avLst/>
@@ -8239,7 +8239,7 @@
           <a:lstStyle xmlns:a="http://schemas.openxmlformats.org/drawingml/2006/main"/>
           <a:p xmlns:a="http://schemas.openxmlformats.org/drawingml/2006/main">
             <a:pPr algn="ctr">
-              <a:defRPr sz="2175" b="1">
+              <a:defRPr sz="2100" b="1">
                 <a:solidFill>
                   <a:srgbClr val="17253A"/>
                 </a:solidFill>
@@ -8249,7 +8249,7 @@
               </a:defRPr>
             </a:pPr>
             <a:r>
-              <a:rPr sz="2175" b="1">
+              <a:rPr sz="2100" b="1">
                 <a:solidFill>
                   <a:srgbClr val="17253A"/>
                 </a:solidFill>
@@ -8267,28 +8267,30 @@
           <p:cNvPr id="11" name="">
             <a:extLst xmlns:a="http://schemas.openxmlformats.org/drawingml/2006/main">
               <a:ext uri="{FF2B5EF4-FFF2-40B4-BE49-F238E27FC236}">
-                <a16:creationId xmlns:a16="http://schemas.microsoft.com/office/drawing/2014/main" id="{0F2395D5-3C2B-4A12-B8B4-C893D546A1AE}"/>
-              </a:ext>
-            </a:extLst>
-          </p:cNvPr>
-          <p:cNvSpPr>
-            <a:spLocks xmlns:a="http://schemas.openxmlformats.org/drawingml/2006/main" noGrp="1"/>
-          </p:cNvSpPr>
-          <p:nvPr/>
-        </p:nvSpPr>
-        <p:spPr>
-          <a:xfrm xmlns:a="http://schemas.openxmlformats.org/drawingml/2006/main">
-            <a:off x="1000125" y="2247900"/>
-            <a:ext cx="476250" cy="476250"/>
-          </a:xfrm>
-          <a:prstGeom xmlns:a="http://schemas.openxmlformats.org/drawingml/2006/main" prst="ellipse">
+                <a16:creationId xmlns:a16="http://schemas.microsoft.com/office/drawing/2014/main" id="{7F4E9FAE-D392-4EC9-9654-11E40EDDF79E}"/>
+              </a:ext>
+            </a:extLst>
+          </p:cNvPr>
+          <p:cNvSpPr>
+            <a:spLocks xmlns:a="http://schemas.openxmlformats.org/drawingml/2006/main" noGrp="1"/>
+          </p:cNvSpPr>
+          <p:nvPr/>
+        </p:nvSpPr>
+        <p:spPr>
+          <a:xfrm xmlns:a="http://schemas.openxmlformats.org/drawingml/2006/main">
+            <a:off x="971550" y="2124075"/>
+            <a:ext cx="38100" cy="3524250"/>
+          </a:xfrm>
+          <a:prstGeom xmlns:a="http://schemas.openxmlformats.org/drawingml/2006/main" prst="rect">
             <a:avLst/>
           </a:prstGeom>
           <a:solidFill xmlns:a="http://schemas.openxmlformats.org/drawingml/2006/main">
-            <a:srgbClr val="18324A"/>
+            <a:srgbClr val="2C6E73"/>
           </a:solidFill>
           <a:ln xmlns:a="http://schemas.openxmlformats.org/drawingml/2006/main" w="0">
-            <a:noFill/>
+            <a:solidFill>
+              <a:srgbClr val="2C6E73"/>
+            </a:solidFill>
           </a:ln>
         </p:spPr>
       </p:sp>
@@ -8297,19 +8299,19 @@
           <p:cNvPr id="12" name="">
             <a:extLst xmlns:a="http://schemas.openxmlformats.org/drawingml/2006/main">
               <a:ext uri="{FF2B5EF4-FFF2-40B4-BE49-F238E27FC236}">
-                <a16:creationId xmlns:a16="http://schemas.microsoft.com/office/drawing/2014/main" id="{3EA527C1-6890-46E8-A350-3DB87C020CDF}"/>
-              </a:ext>
-            </a:extLst>
-          </p:cNvPr>
-          <p:cNvSpPr>
-            <a:spLocks xmlns:a="http://schemas.openxmlformats.org/drawingml/2006/main" noGrp="1"/>
-          </p:cNvSpPr>
-          <p:nvPr/>
-        </p:nvSpPr>
-        <p:spPr>
-          <a:xfrm xmlns:a="http://schemas.openxmlformats.org/drawingml/2006/main">
-            <a:off x="1000125" y="2276475"/>
-            <a:ext cx="476250" cy="419100"/>
+                <a16:creationId xmlns:a16="http://schemas.microsoft.com/office/drawing/2014/main" id="{A7BD66A7-6475-48D8-A7A0-5F0B82938279}"/>
+              </a:ext>
+            </a:extLst>
+          </p:cNvPr>
+          <p:cNvSpPr>
+            <a:spLocks xmlns:a="http://schemas.openxmlformats.org/drawingml/2006/main" noGrp="1"/>
+          </p:cNvSpPr>
+          <p:nvPr/>
+        </p:nvSpPr>
+        <p:spPr>
+          <a:xfrm xmlns:a="http://schemas.openxmlformats.org/drawingml/2006/main">
+            <a:off x="1162050" y="2200275"/>
+            <a:ext cx="400050" cy="400050"/>
           </a:xfrm>
           <a:prstGeom xmlns:a="http://schemas.openxmlformats.org/drawingml/2006/main" prst="rect">
             <a:avLst/>
@@ -8326,9 +8328,9 @@
           <a:lstStyle xmlns:a="http://schemas.openxmlformats.org/drawingml/2006/main"/>
           <a:p xmlns:a="http://schemas.openxmlformats.org/drawingml/2006/main">
             <a:pPr algn="ctr">
-              <a:defRPr sz="1350" b="1">
-                <a:solidFill>
-                  <a:srgbClr val="FFFFFF"/>
+              <a:defRPr sz="1125" b="1">
+                <a:solidFill>
+                  <a:srgbClr val="2C6E73"/>
                 </a:solidFill>
                 <a:latin typeface="Arial"/>
                 <a:ea typeface="Arial"/>
@@ -8336,9 +8338,9 @@
               </a:defRPr>
             </a:pPr>
             <a:r>
-              <a:rPr sz="1350" b="1">
-                <a:solidFill>
-                  <a:srgbClr val="FFFFFF"/>
+              <a:rPr sz="1125" b="1">
+                <a:solidFill>
+                  <a:srgbClr val="2C6E73"/>
                 </a:solidFill>
                 <a:latin typeface="Arial"/>
                 <a:ea typeface="Arial"/>
@@ -8354,19 +8356,19 @@
           <p:cNvPr id="13" name="">
             <a:extLst xmlns:a="http://schemas.openxmlformats.org/drawingml/2006/main">
               <a:ext uri="{FF2B5EF4-FFF2-40B4-BE49-F238E27FC236}">
-                <a16:creationId xmlns:a16="http://schemas.microsoft.com/office/drawing/2014/main" id="{37F47AF5-604A-4E1F-ADBA-2F0D76A4EEA5}"/>
-              </a:ext>
-            </a:extLst>
-          </p:cNvPr>
-          <p:cNvSpPr>
-            <a:spLocks xmlns:a="http://schemas.openxmlformats.org/drawingml/2006/main" noGrp="1"/>
-          </p:cNvSpPr>
-          <p:nvPr/>
-        </p:nvSpPr>
-        <p:spPr>
-          <a:xfrm xmlns:a="http://schemas.openxmlformats.org/drawingml/2006/main">
-            <a:off x="1714500" y="2181225"/>
-            <a:ext cx="9429750" cy="609600"/>
+                <a16:creationId xmlns:a16="http://schemas.microsoft.com/office/drawing/2014/main" id="{42FD84AE-A1BF-485F-8F99-0D560AF3B4CA}"/>
+              </a:ext>
+            </a:extLst>
+          </p:cNvPr>
+          <p:cNvSpPr>
+            <a:spLocks xmlns:a="http://schemas.openxmlformats.org/drawingml/2006/main" noGrp="1"/>
+          </p:cNvSpPr>
+          <p:nvPr/>
+        </p:nvSpPr>
+        <p:spPr>
+          <a:xfrm xmlns:a="http://schemas.openxmlformats.org/drawingml/2006/main">
+            <a:off x="1714500" y="2114550"/>
+            <a:ext cx="9525000" cy="809625"/>
           </a:xfrm>
           <a:prstGeom xmlns:a="http://schemas.openxmlformats.org/drawingml/2006/main" prst="rect">
             <a:avLst/>
@@ -8383,7 +8385,7 @@
           <a:lstStyle xmlns:a="http://schemas.openxmlformats.org/drawingml/2006/main"/>
           <a:p xmlns:a="http://schemas.openxmlformats.org/drawingml/2006/main">
             <a:pPr algn="l">
-              <a:defRPr sz="1500" b="0">
+              <a:defRPr sz="1725" b="0">
                 <a:solidFill>
                   <a:srgbClr val="17253A"/>
                 </a:solidFill>
@@ -8393,7 +8395,7 @@
               </a:defRPr>
             </a:pPr>
             <a:r>
-              <a:rPr sz="1500" b="0">
+              <a:rPr sz="1725" b="0">
                 <a:solidFill>
                   <a:srgbClr val="17253A"/>
                 </a:solidFill>
@@ -8401,7 +8403,7 @@
                 <a:ea typeface="Arial"/>
                 <a:cs typeface="Arial"/>
               </a:rPr>
-              <a:t>Identify the structure: Identify the number type and choose an efficient method.</a:t>
+              <a:t>3/4 + 5/8</a:t>
             </a:r>
           </a:p>
         </p:txBody>
@@ -8411,28 +8413,30 @@
           <p:cNvPr id="14" name="">
             <a:extLst xmlns:a="http://schemas.openxmlformats.org/drawingml/2006/main">
               <a:ext uri="{FF2B5EF4-FFF2-40B4-BE49-F238E27FC236}">
-                <a16:creationId xmlns:a16="http://schemas.microsoft.com/office/drawing/2014/main" id="{732D11BE-12A7-4291-8766-C49ACC1CFDE6}"/>
-              </a:ext>
-            </a:extLst>
-          </p:cNvPr>
-          <p:cNvSpPr>
-            <a:spLocks xmlns:a="http://schemas.openxmlformats.org/drawingml/2006/main" noGrp="1"/>
-          </p:cNvSpPr>
-          <p:nvPr/>
-        </p:nvSpPr>
-        <p:spPr>
-          <a:xfrm xmlns:a="http://schemas.openxmlformats.org/drawingml/2006/main">
-            <a:off x="1000125" y="2990850"/>
-            <a:ext cx="476250" cy="476250"/>
-          </a:xfrm>
-          <a:prstGeom xmlns:a="http://schemas.openxmlformats.org/drawingml/2006/main" prst="ellipse">
+                <a16:creationId xmlns:a16="http://schemas.microsoft.com/office/drawing/2014/main" id="{F6416DC5-426B-4123-90F1-9E149DA2B3EF}"/>
+              </a:ext>
+            </a:extLst>
+          </p:cNvPr>
+          <p:cNvSpPr>
+            <a:spLocks xmlns:a="http://schemas.openxmlformats.org/drawingml/2006/main" noGrp="1"/>
+          </p:cNvSpPr>
+          <p:nvPr/>
+        </p:nvSpPr>
+        <p:spPr>
+          <a:xfrm xmlns:a="http://schemas.openxmlformats.org/drawingml/2006/main">
+            <a:off x="1714500" y="2943225"/>
+            <a:ext cx="9334500" cy="9525"/>
+          </a:xfrm>
+          <a:prstGeom xmlns:a="http://schemas.openxmlformats.org/drawingml/2006/main" prst="rect">
             <a:avLst/>
           </a:prstGeom>
           <a:solidFill xmlns:a="http://schemas.openxmlformats.org/drawingml/2006/main">
-            <a:srgbClr val="2C6E73"/>
+            <a:srgbClr val="D9E0E6"/>
           </a:solidFill>
           <a:ln xmlns:a="http://schemas.openxmlformats.org/drawingml/2006/main" w="0">
-            <a:noFill/>
+            <a:solidFill>
+              <a:srgbClr val="D9E0E6"/>
+            </a:solidFill>
           </a:ln>
         </p:spPr>
       </p:sp>
@@ -8441,19 +8445,19 @@
           <p:cNvPr id="15" name="">
             <a:extLst xmlns:a="http://schemas.openxmlformats.org/drawingml/2006/main">
               <a:ext uri="{FF2B5EF4-FFF2-40B4-BE49-F238E27FC236}">
-                <a16:creationId xmlns:a16="http://schemas.microsoft.com/office/drawing/2014/main" id="{967209D8-FD9C-4EE7-BDF7-AFA143635218}"/>
-              </a:ext>
-            </a:extLst>
-          </p:cNvPr>
-          <p:cNvSpPr>
-            <a:spLocks xmlns:a="http://schemas.openxmlformats.org/drawingml/2006/main" noGrp="1"/>
-          </p:cNvSpPr>
-          <p:nvPr/>
-        </p:nvSpPr>
-        <p:spPr>
-          <a:xfrm xmlns:a="http://schemas.openxmlformats.org/drawingml/2006/main">
-            <a:off x="1000125" y="3019425"/>
-            <a:ext cx="476250" cy="419100"/>
+                <a16:creationId xmlns:a16="http://schemas.microsoft.com/office/drawing/2014/main" id="{AF5B3618-562A-4064-A5F8-32ACA6A190CD}"/>
+              </a:ext>
+            </a:extLst>
+          </p:cNvPr>
+          <p:cNvSpPr>
+            <a:spLocks xmlns:a="http://schemas.openxmlformats.org/drawingml/2006/main" noGrp="1"/>
+          </p:cNvSpPr>
+          <p:nvPr/>
+        </p:nvSpPr>
+        <p:spPr>
+          <a:xfrm xmlns:a="http://schemas.openxmlformats.org/drawingml/2006/main">
+            <a:off x="1162050" y="3076575"/>
+            <a:ext cx="400050" cy="400050"/>
           </a:xfrm>
           <a:prstGeom xmlns:a="http://schemas.openxmlformats.org/drawingml/2006/main" prst="rect">
             <a:avLst/>
@@ -8470,9 +8474,9 @@
           <a:lstStyle xmlns:a="http://schemas.openxmlformats.org/drawingml/2006/main"/>
           <a:p xmlns:a="http://schemas.openxmlformats.org/drawingml/2006/main">
             <a:pPr algn="ctr">
-              <a:defRPr sz="1350" b="1">
-                <a:solidFill>
-                  <a:srgbClr val="FFFFFF"/>
+              <a:defRPr sz="1125" b="1">
+                <a:solidFill>
+                  <a:srgbClr val="2C6E73"/>
                 </a:solidFill>
                 <a:latin typeface="Arial"/>
                 <a:ea typeface="Arial"/>
@@ -8480,9 +8484,9 @@
               </a:defRPr>
             </a:pPr>
             <a:r>
-              <a:rPr sz="1350" b="1">
-                <a:solidFill>
-                  <a:srgbClr val="FFFFFF"/>
+              <a:rPr sz="1125" b="1">
+                <a:solidFill>
+                  <a:srgbClr val="2C6E73"/>
                 </a:solidFill>
                 <a:latin typeface="Arial"/>
                 <a:ea typeface="Arial"/>
@@ -8498,19 +8502,19 @@
           <p:cNvPr id="16" name="">
             <a:extLst xmlns:a="http://schemas.openxmlformats.org/drawingml/2006/main">
               <a:ext uri="{FF2B5EF4-FFF2-40B4-BE49-F238E27FC236}">
-                <a16:creationId xmlns:a16="http://schemas.microsoft.com/office/drawing/2014/main" id="{424E1520-879B-414B-8FF2-39C772396619}"/>
-              </a:ext>
-            </a:extLst>
-          </p:cNvPr>
-          <p:cNvSpPr>
-            <a:spLocks xmlns:a="http://schemas.openxmlformats.org/drawingml/2006/main" noGrp="1"/>
-          </p:cNvSpPr>
-          <p:nvPr/>
-        </p:nvSpPr>
-        <p:spPr>
-          <a:xfrm xmlns:a="http://schemas.openxmlformats.org/drawingml/2006/main">
-            <a:off x="1714500" y="2924175"/>
-            <a:ext cx="9429750" cy="609600"/>
+                <a16:creationId xmlns:a16="http://schemas.microsoft.com/office/drawing/2014/main" id="{6B3A0C30-3BCE-4FB4-84AA-1F9C519F34D0}"/>
+              </a:ext>
+            </a:extLst>
+          </p:cNvPr>
+          <p:cNvSpPr>
+            <a:spLocks xmlns:a="http://schemas.openxmlformats.org/drawingml/2006/main" noGrp="1"/>
+          </p:cNvSpPr>
+          <p:nvPr/>
+        </p:nvSpPr>
+        <p:spPr>
+          <a:xfrm xmlns:a="http://schemas.openxmlformats.org/drawingml/2006/main">
+            <a:off x="1714500" y="2990850"/>
+            <a:ext cx="9525000" cy="809625"/>
           </a:xfrm>
           <a:prstGeom xmlns:a="http://schemas.openxmlformats.org/drawingml/2006/main" prst="rect">
             <a:avLst/>
@@ -8527,7 +8531,7 @@
           <a:lstStyle xmlns:a="http://schemas.openxmlformats.org/drawingml/2006/main"/>
           <a:p xmlns:a="http://schemas.openxmlformats.org/drawingml/2006/main">
             <a:pPr algn="l">
-              <a:defRPr sz="1500" b="0">
+              <a:defRPr sz="1725" b="0">
                 <a:solidFill>
                   <a:srgbClr val="17253A"/>
                 </a:solidFill>
@@ -8537,7 +8541,7 @@
               </a:defRPr>
             </a:pPr>
             <a:r>
-              <a:rPr sz="1500" b="0">
+              <a:rPr sz="1725" b="0">
                 <a:solidFill>
                   <a:srgbClr val="17253A"/>
                 </a:solidFill>
@@ -8545,7 +8549,7 @@
                 <a:ea typeface="Arial"/>
                 <a:cs typeface="Arial"/>
               </a:rPr>
-              <a:t>Set up the method: Keep place values or denominators aligned and record each stage.</a:t>
+              <a:t>3/4 = 6/8</a:t>
             </a:r>
           </a:p>
         </p:txBody>
@@ -8555,28 +8559,30 @@
           <p:cNvPr id="17" name="">
             <a:extLst xmlns:a="http://schemas.openxmlformats.org/drawingml/2006/main">
               <a:ext uri="{FF2B5EF4-FFF2-40B4-BE49-F238E27FC236}">
-                <a16:creationId xmlns:a16="http://schemas.microsoft.com/office/drawing/2014/main" id="{9CC4021B-D55F-4105-AD59-279DE0D4AC33}"/>
-              </a:ext>
-            </a:extLst>
-          </p:cNvPr>
-          <p:cNvSpPr>
-            <a:spLocks xmlns:a="http://schemas.openxmlformats.org/drawingml/2006/main" noGrp="1"/>
-          </p:cNvSpPr>
-          <p:nvPr/>
-        </p:nvSpPr>
-        <p:spPr>
-          <a:xfrm xmlns:a="http://schemas.openxmlformats.org/drawingml/2006/main">
-            <a:off x="1000125" y="3733800"/>
-            <a:ext cx="476250" cy="476250"/>
-          </a:xfrm>
-          <a:prstGeom xmlns:a="http://schemas.openxmlformats.org/drawingml/2006/main" prst="ellipse">
+                <a16:creationId xmlns:a16="http://schemas.microsoft.com/office/drawing/2014/main" id="{6607C14E-5AE4-4FAB-8FB2-9462774A6C8C}"/>
+              </a:ext>
+            </a:extLst>
+          </p:cNvPr>
+          <p:cNvSpPr>
+            <a:spLocks xmlns:a="http://schemas.openxmlformats.org/drawingml/2006/main" noGrp="1"/>
+          </p:cNvSpPr>
+          <p:nvPr/>
+        </p:nvSpPr>
+        <p:spPr>
+          <a:xfrm xmlns:a="http://schemas.openxmlformats.org/drawingml/2006/main">
+            <a:off x="1714500" y="3819525"/>
+            <a:ext cx="9334500" cy="9525"/>
+          </a:xfrm>
+          <a:prstGeom xmlns:a="http://schemas.openxmlformats.org/drawingml/2006/main" prst="rect">
             <a:avLst/>
           </a:prstGeom>
           <a:solidFill xmlns:a="http://schemas.openxmlformats.org/drawingml/2006/main">
-            <a:srgbClr val="2C6E73"/>
+            <a:srgbClr val="D9E0E6"/>
           </a:solidFill>
           <a:ln xmlns:a="http://schemas.openxmlformats.org/drawingml/2006/main" w="0">
-            <a:noFill/>
+            <a:solidFill>
+              <a:srgbClr val="D9E0E6"/>
+            </a:solidFill>
           </a:ln>
         </p:spPr>
       </p:sp>
@@ -8585,19 +8591,19 @@
           <p:cNvPr id="18" name="">
             <a:extLst xmlns:a="http://schemas.openxmlformats.org/drawingml/2006/main">
               <a:ext uri="{FF2B5EF4-FFF2-40B4-BE49-F238E27FC236}">
-                <a16:creationId xmlns:a16="http://schemas.microsoft.com/office/drawing/2014/main" id="{215C0388-11CC-4812-8C22-D0270EFBFBE4}"/>
-              </a:ext>
-            </a:extLst>
-          </p:cNvPr>
-          <p:cNvSpPr>
-            <a:spLocks xmlns:a="http://schemas.openxmlformats.org/drawingml/2006/main" noGrp="1"/>
-          </p:cNvSpPr>
-          <p:nvPr/>
-        </p:nvSpPr>
-        <p:spPr>
-          <a:xfrm xmlns:a="http://schemas.openxmlformats.org/drawingml/2006/main">
-            <a:off x="1000125" y="3762375"/>
-            <a:ext cx="476250" cy="419100"/>
+                <a16:creationId xmlns:a16="http://schemas.microsoft.com/office/drawing/2014/main" id="{87F93067-5961-41B6-87FE-FC4A6185387B}"/>
+              </a:ext>
+            </a:extLst>
+          </p:cNvPr>
+          <p:cNvSpPr>
+            <a:spLocks xmlns:a="http://schemas.openxmlformats.org/drawingml/2006/main" noGrp="1"/>
+          </p:cNvSpPr>
+          <p:nvPr/>
+        </p:nvSpPr>
+        <p:spPr>
+          <a:xfrm xmlns:a="http://schemas.openxmlformats.org/drawingml/2006/main">
+            <a:off x="1162050" y="3952875"/>
+            <a:ext cx="400050" cy="400050"/>
           </a:xfrm>
           <a:prstGeom xmlns:a="http://schemas.openxmlformats.org/drawingml/2006/main" prst="rect">
             <a:avLst/>
@@ -8614,9 +8620,9 @@
           <a:lstStyle xmlns:a="http://schemas.openxmlformats.org/drawingml/2006/main"/>
           <a:p xmlns:a="http://schemas.openxmlformats.org/drawingml/2006/main">
             <a:pPr algn="ctr">
-              <a:defRPr sz="1350" b="1">
-                <a:solidFill>
-                  <a:srgbClr val="FFFFFF"/>
+              <a:defRPr sz="1125" b="1">
+                <a:solidFill>
+                  <a:srgbClr val="2C6E73"/>
                 </a:solidFill>
                 <a:latin typeface="Arial"/>
                 <a:ea typeface="Arial"/>
@@ -8624,9 +8630,9 @@
               </a:defRPr>
             </a:pPr>
             <a:r>
-              <a:rPr sz="1350" b="1">
-                <a:solidFill>
-                  <a:srgbClr val="FFFFFF"/>
+              <a:rPr sz="1125" b="1">
+                <a:solidFill>
+                  <a:srgbClr val="2C6E73"/>
                 </a:solidFill>
                 <a:latin typeface="Arial"/>
                 <a:ea typeface="Arial"/>
@@ -8642,19 +8648,19 @@
           <p:cNvPr id="19" name="">
             <a:extLst xmlns:a="http://schemas.openxmlformats.org/drawingml/2006/main">
               <a:ext uri="{FF2B5EF4-FFF2-40B4-BE49-F238E27FC236}">
-                <a16:creationId xmlns:a16="http://schemas.microsoft.com/office/drawing/2014/main" id="{4BFCAAB2-95C3-4910-BDE4-4A0D7A8982F6}"/>
-              </a:ext>
-            </a:extLst>
-          </p:cNvPr>
-          <p:cNvSpPr>
-            <a:spLocks xmlns:a="http://schemas.openxmlformats.org/drawingml/2006/main" noGrp="1"/>
-          </p:cNvSpPr>
-          <p:nvPr/>
-        </p:nvSpPr>
-        <p:spPr>
-          <a:xfrm xmlns:a="http://schemas.openxmlformats.org/drawingml/2006/main">
-            <a:off x="1714500" y="3667125"/>
-            <a:ext cx="9429750" cy="609600"/>
+                <a16:creationId xmlns:a16="http://schemas.microsoft.com/office/drawing/2014/main" id="{C9BBCFC4-AB1F-4553-B98C-AD0EED1463F7}"/>
+              </a:ext>
+            </a:extLst>
+          </p:cNvPr>
+          <p:cNvSpPr>
+            <a:spLocks xmlns:a="http://schemas.openxmlformats.org/drawingml/2006/main" noGrp="1"/>
+          </p:cNvSpPr>
+          <p:nvPr/>
+        </p:nvSpPr>
+        <p:spPr>
+          <a:xfrm xmlns:a="http://schemas.openxmlformats.org/drawingml/2006/main">
+            <a:off x="1714500" y="3867150"/>
+            <a:ext cx="9525000" cy="809625"/>
           </a:xfrm>
           <a:prstGeom xmlns:a="http://schemas.openxmlformats.org/drawingml/2006/main" prst="rect">
             <a:avLst/>
@@ -8671,7 +8677,7 @@
           <a:lstStyle xmlns:a="http://schemas.openxmlformats.org/drawingml/2006/main"/>
           <a:p xmlns:a="http://schemas.openxmlformats.org/drawingml/2006/main">
             <a:pPr algn="l">
-              <a:defRPr sz="1500" b="0">
+              <a:defRPr sz="1725" b="0">
                 <a:solidFill>
                   <a:srgbClr val="17253A"/>
                 </a:solidFill>
@@ -8681,7 +8687,7 @@
               </a:defRPr>
             </a:pPr>
             <a:r>
-              <a:rPr sz="1500" b="0">
+              <a:rPr sz="1725" b="0">
                 <a:solidFill>
                   <a:srgbClr val="17253A"/>
                 </a:solidFill>
@@ -8689,7 +8695,7 @@
                 <a:ea typeface="Arial"/>
                 <a:cs typeface="Arial"/>
               </a:rPr>
-              <a:t>Complete the calculation: 11/8 or 1 3/8.</a:t>
+              <a:t>6/8 + 5/8 = 11/8</a:t>
             </a:r>
           </a:p>
         </p:txBody>
@@ -8699,28 +8705,30 @@
           <p:cNvPr id="20" name="">
             <a:extLst xmlns:a="http://schemas.openxmlformats.org/drawingml/2006/main">
               <a:ext uri="{FF2B5EF4-FFF2-40B4-BE49-F238E27FC236}">
-                <a16:creationId xmlns:a16="http://schemas.microsoft.com/office/drawing/2014/main" id="{3DED89A7-B924-4757-A00B-0A89744638EC}"/>
-              </a:ext>
-            </a:extLst>
-          </p:cNvPr>
-          <p:cNvSpPr>
-            <a:spLocks xmlns:a="http://schemas.openxmlformats.org/drawingml/2006/main" noGrp="1"/>
-          </p:cNvSpPr>
-          <p:nvPr/>
-        </p:nvSpPr>
-        <p:spPr>
-          <a:xfrm xmlns:a="http://schemas.openxmlformats.org/drawingml/2006/main">
-            <a:off x="1000125" y="4476750"/>
-            <a:ext cx="476250" cy="476250"/>
-          </a:xfrm>
-          <a:prstGeom xmlns:a="http://schemas.openxmlformats.org/drawingml/2006/main" prst="ellipse">
+                <a16:creationId xmlns:a16="http://schemas.microsoft.com/office/drawing/2014/main" id="{7555EAD9-B273-48CB-9691-B93FF182877B}"/>
+              </a:ext>
+            </a:extLst>
+          </p:cNvPr>
+          <p:cNvSpPr>
+            <a:spLocks xmlns:a="http://schemas.openxmlformats.org/drawingml/2006/main" noGrp="1"/>
+          </p:cNvSpPr>
+          <p:nvPr/>
+        </p:nvSpPr>
+        <p:spPr>
+          <a:xfrm xmlns:a="http://schemas.openxmlformats.org/drawingml/2006/main">
+            <a:off x="1714500" y="4695825"/>
+            <a:ext cx="9334500" cy="9525"/>
+          </a:xfrm>
+          <a:prstGeom xmlns:a="http://schemas.openxmlformats.org/drawingml/2006/main" prst="rect">
             <a:avLst/>
           </a:prstGeom>
           <a:solidFill xmlns:a="http://schemas.openxmlformats.org/drawingml/2006/main">
-            <a:srgbClr val="2C6E73"/>
+            <a:srgbClr val="D9E0E6"/>
           </a:solidFill>
           <a:ln xmlns:a="http://schemas.openxmlformats.org/drawingml/2006/main" w="0">
-            <a:noFill/>
+            <a:solidFill>
+              <a:srgbClr val="D9E0E6"/>
+            </a:solidFill>
           </a:ln>
         </p:spPr>
       </p:sp>
@@ -8729,19 +8737,19 @@
           <p:cNvPr id="21" name="">
             <a:extLst xmlns:a="http://schemas.openxmlformats.org/drawingml/2006/main">
               <a:ext uri="{FF2B5EF4-FFF2-40B4-BE49-F238E27FC236}">
-                <a16:creationId xmlns:a16="http://schemas.microsoft.com/office/drawing/2014/main" id="{E27CFCF4-09FF-4042-B42B-9CB1D40AF3DE}"/>
-              </a:ext>
-            </a:extLst>
-          </p:cNvPr>
-          <p:cNvSpPr>
-            <a:spLocks xmlns:a="http://schemas.openxmlformats.org/drawingml/2006/main" noGrp="1"/>
-          </p:cNvSpPr>
-          <p:nvPr/>
-        </p:nvSpPr>
-        <p:spPr>
-          <a:xfrm xmlns:a="http://schemas.openxmlformats.org/drawingml/2006/main">
-            <a:off x="1000125" y="4505325"/>
-            <a:ext cx="476250" cy="419100"/>
+                <a16:creationId xmlns:a16="http://schemas.microsoft.com/office/drawing/2014/main" id="{200A3C39-A7BA-417F-A342-8AC7E5F23515}"/>
+              </a:ext>
+            </a:extLst>
+          </p:cNvPr>
+          <p:cNvSpPr>
+            <a:spLocks xmlns:a="http://schemas.openxmlformats.org/drawingml/2006/main" noGrp="1"/>
+          </p:cNvSpPr>
+          <p:nvPr/>
+        </p:nvSpPr>
+        <p:spPr>
+          <a:xfrm xmlns:a="http://schemas.openxmlformats.org/drawingml/2006/main">
+            <a:off x="1162050" y="4829175"/>
+            <a:ext cx="400050" cy="400050"/>
           </a:xfrm>
           <a:prstGeom xmlns:a="http://schemas.openxmlformats.org/drawingml/2006/main" prst="rect">
             <a:avLst/>
@@ -8758,9 +8766,9 @@
           <a:lstStyle xmlns:a="http://schemas.openxmlformats.org/drawingml/2006/main"/>
           <a:p xmlns:a="http://schemas.openxmlformats.org/drawingml/2006/main">
             <a:pPr algn="ctr">
-              <a:defRPr sz="1350" b="1">
-                <a:solidFill>
-                  <a:srgbClr val="FFFFFF"/>
+              <a:defRPr sz="1125" b="1">
+                <a:solidFill>
+                  <a:srgbClr val="2F785D"/>
                 </a:solidFill>
                 <a:latin typeface="Arial"/>
                 <a:ea typeface="Arial"/>
@@ -8768,9 +8776,9 @@
               </a:defRPr>
             </a:pPr>
             <a:r>
-              <a:rPr sz="1350" b="1">
-                <a:solidFill>
-                  <a:srgbClr val="FFFFFF"/>
+              <a:rPr sz="1125" b="1">
+                <a:solidFill>
+                  <a:srgbClr val="2F785D"/>
                 </a:solidFill>
                 <a:latin typeface="Arial"/>
                 <a:ea typeface="Arial"/>
@@ -8786,19 +8794,19 @@
           <p:cNvPr id="22" name="">
             <a:extLst xmlns:a="http://schemas.openxmlformats.org/drawingml/2006/main">
               <a:ext uri="{FF2B5EF4-FFF2-40B4-BE49-F238E27FC236}">
-                <a16:creationId xmlns:a16="http://schemas.microsoft.com/office/drawing/2014/main" id="{14216EF1-0098-4FDA-8D73-31F73282507F}"/>
-              </a:ext>
-            </a:extLst>
-          </p:cNvPr>
-          <p:cNvSpPr>
-            <a:spLocks xmlns:a="http://schemas.openxmlformats.org/drawingml/2006/main" noGrp="1"/>
-          </p:cNvSpPr>
-          <p:nvPr/>
-        </p:nvSpPr>
-        <p:spPr>
-          <a:xfrm xmlns:a="http://schemas.openxmlformats.org/drawingml/2006/main">
-            <a:off x="1714500" y="4410075"/>
-            <a:ext cx="9429750" cy="609600"/>
+                <a16:creationId xmlns:a16="http://schemas.microsoft.com/office/drawing/2014/main" id="{FAEB11EF-2601-4786-AC8B-5B147B67F3AA}"/>
+              </a:ext>
+            </a:extLst>
+          </p:cNvPr>
+          <p:cNvSpPr>
+            <a:spLocks xmlns:a="http://schemas.openxmlformats.org/drawingml/2006/main" noGrp="1"/>
+          </p:cNvSpPr>
+          <p:nvPr/>
+        </p:nvSpPr>
+        <p:spPr>
+          <a:xfrm xmlns:a="http://schemas.openxmlformats.org/drawingml/2006/main">
+            <a:off x="1714500" y="4743450"/>
+            <a:ext cx="9525000" cy="809625"/>
           </a:xfrm>
           <a:prstGeom xmlns:a="http://schemas.openxmlformats.org/drawingml/2006/main" prst="rect">
             <a:avLst/>
@@ -8815,7 +8823,7 @@
           <a:lstStyle xmlns:a="http://schemas.openxmlformats.org/drawingml/2006/main"/>
           <a:p xmlns:a="http://schemas.openxmlformats.org/drawingml/2006/main">
             <a:pPr algn="l">
-              <a:defRPr sz="1500" b="1">
+              <a:defRPr sz="1725" b="1">
                 <a:solidFill>
                   <a:srgbClr val="2F785D"/>
                 </a:solidFill>
@@ -8825,7 +8833,7 @@
               </a:defRPr>
             </a:pPr>
             <a:r>
-              <a:rPr sz="1500" b="1">
+              <a:rPr sz="1725" b="1">
                 <a:solidFill>
                   <a:srgbClr val="2F785D"/>
                 </a:solidFill>
@@ -8833,7 +8841,7 @@
                 <a:ea typeface="Arial"/>
                 <a:cs typeface="Arial"/>
               </a:rPr>
-              <a:t>Check the result: Simplify where needed and check the result for size and reasonableness.</a:t>
+              <a:t>11/8 = 1 3/8</a:t>
             </a:r>
           </a:p>
         </p:txBody>
@@ -8841,7 +8849,7 @@
     </p:spTree>
     <p:extLst>
       <p:ext uri="{BB962C8B-B14F-4D97-AF65-F5344CB8AC3E}">
-        <p14:creationId xmlns:p14="http://schemas.microsoft.com/office/powerpoint/2010/main" val="938124199"/>
+        <p14:creationId xmlns:p14="http://schemas.microsoft.com/office/powerpoint/2010/main" val="1395572697"/>
       </p:ext>
     </p:extLst>
   </p:cSld>
@@ -9134,7 +9142,7 @@
           <p:cNvPr id="15" name="">
             <a:extLst xmlns:a="http://schemas.openxmlformats.org/drawingml/2006/main">
               <a:ext uri="{FF2B5EF4-FFF2-40B4-BE49-F238E27FC236}">
-                <a16:creationId xmlns:a16="http://schemas.microsoft.com/office/drawing/2014/main" id="{16CF51AA-8E4A-4CDE-9F7A-CC7D1EE5FFD0}"/>
+                <a16:creationId xmlns:a16="http://schemas.microsoft.com/office/drawing/2014/main" id="{E00BF168-0E35-4D0C-B72B-B67BDD71A696}"/>
               </a:ext>
             </a:extLst>
           </p:cNvPr>
@@ -9166,7 +9174,7 @@
           <p:cNvPr id="2" name="">
             <a:extLst xmlns:a="http://schemas.openxmlformats.org/drawingml/2006/main">
               <a:ext uri="{FF2B5EF4-FFF2-40B4-BE49-F238E27FC236}">
-                <a16:creationId xmlns:a16="http://schemas.microsoft.com/office/drawing/2014/main" id="{B0733934-36D5-486F-B246-99BD849A5452}"/>
+                <a16:creationId xmlns:a16="http://schemas.microsoft.com/office/drawing/2014/main" id="{00301ACB-A234-4E8D-BB99-26673DFE28A0}"/>
               </a:ext>
             </a:extLst>
           </p:cNvPr>
@@ -9223,7 +9231,7 @@
           <p:cNvPr id="3" name="">
             <a:extLst xmlns:a="http://schemas.openxmlformats.org/drawingml/2006/main">
               <a:ext uri="{FF2B5EF4-FFF2-40B4-BE49-F238E27FC236}">
-                <a16:creationId xmlns:a16="http://schemas.microsoft.com/office/drawing/2014/main" id="{449F84C8-0D47-4C37-8D8F-5F88C2AEFA7F}"/>
+                <a16:creationId xmlns:a16="http://schemas.microsoft.com/office/drawing/2014/main" id="{99C414E9-42CF-4805-A39C-37D99987F990}"/>
               </a:ext>
             </a:extLst>
           </p:cNvPr>
@@ -9255,7 +9263,7 @@
           <p:cNvPr id="4" name="">
             <a:extLst xmlns:a="http://schemas.openxmlformats.org/drawingml/2006/main">
               <a:ext uri="{FF2B5EF4-FFF2-40B4-BE49-F238E27FC236}">
-                <a16:creationId xmlns:a16="http://schemas.microsoft.com/office/drawing/2014/main" id="{BBCB7941-B00E-4A28-B80C-5CBED48B9E75}"/>
+                <a16:creationId xmlns:a16="http://schemas.microsoft.com/office/drawing/2014/main" id="{1FE69162-6937-4B25-AAD5-AE7BBA8B1561}"/>
               </a:ext>
             </a:extLst>
           </p:cNvPr>
@@ -9312,7 +9320,7 @@
           <p:cNvPr id="5" name="">
             <a:extLst xmlns:a="http://schemas.openxmlformats.org/drawingml/2006/main">
               <a:ext uri="{FF2B5EF4-FFF2-40B4-BE49-F238E27FC236}">
-                <a16:creationId xmlns:a16="http://schemas.microsoft.com/office/drawing/2014/main" id="{07536073-B4AF-438D-9285-8B2A6E149CE8}"/>
+                <a16:creationId xmlns:a16="http://schemas.microsoft.com/office/drawing/2014/main" id="{FB8E5B9B-FE9C-4858-B5B3-6DD717C84DAC}"/>
               </a:ext>
             </a:extLst>
           </p:cNvPr>
@@ -9369,7 +9377,7 @@
           <p:cNvPr id="6" name="">
             <a:extLst xmlns:a="http://schemas.openxmlformats.org/drawingml/2006/main">
               <a:ext uri="{FF2B5EF4-FFF2-40B4-BE49-F238E27FC236}">
-                <a16:creationId xmlns:a16="http://schemas.microsoft.com/office/drawing/2014/main" id="{F48DAC08-94FB-417E-AA6B-ACFB7E00379C}"/>
+                <a16:creationId xmlns:a16="http://schemas.microsoft.com/office/drawing/2014/main" id="{24900343-05F0-4F1E-A1D0-204A33176412}"/>
               </a:ext>
             </a:extLst>
           </p:cNvPr>
@@ -9426,7 +9434,7 @@
           <p:cNvPr id="7" name="">
             <a:extLst xmlns:a="http://schemas.openxmlformats.org/drawingml/2006/main">
               <a:ext uri="{FF2B5EF4-FFF2-40B4-BE49-F238E27FC236}">
-                <a16:creationId xmlns:a16="http://schemas.microsoft.com/office/drawing/2014/main" id="{7E06DBB9-FEE9-4A87-9B2F-275A4A532C7D}"/>
+                <a16:creationId xmlns:a16="http://schemas.microsoft.com/office/drawing/2014/main" id="{F0C4DA90-5886-4CD8-90DC-63E44EAAA740}"/>
               </a:ext>
             </a:extLst>
           </p:cNvPr>
@@ -9458,7 +9466,7 @@
           <p:cNvPr id="8" name="">
             <a:extLst xmlns:a="http://schemas.openxmlformats.org/drawingml/2006/main">
               <a:ext uri="{FF2B5EF4-FFF2-40B4-BE49-F238E27FC236}">
-                <a16:creationId xmlns:a16="http://schemas.microsoft.com/office/drawing/2014/main" id="{E1857FE3-56BD-4DE2-BC76-7CF4303D3EF0}"/>
+                <a16:creationId xmlns:a16="http://schemas.microsoft.com/office/drawing/2014/main" id="{27BD12D0-382C-4D53-8879-AC7041C04050}"/>
               </a:ext>
             </a:extLst>
           </p:cNvPr>
@@ -9515,7 +9523,7 @@
           <p:cNvPr id="9" name="">
             <a:extLst xmlns:a="http://schemas.openxmlformats.org/drawingml/2006/main">
               <a:ext uri="{FF2B5EF4-FFF2-40B4-BE49-F238E27FC236}">
-                <a16:creationId xmlns:a16="http://schemas.microsoft.com/office/drawing/2014/main" id="{A3AA3949-9835-4B6B-91E8-AAC397636017}"/>
+                <a16:creationId xmlns:a16="http://schemas.microsoft.com/office/drawing/2014/main" id="{A48E02C2-2334-40C2-BD0A-8EF2EA4E43E8}"/>
               </a:ext>
             </a:extLst>
           </p:cNvPr>
@@ -9572,7 +9580,7 @@
           <p:cNvPr id="10" name="">
             <a:extLst xmlns:a="http://schemas.openxmlformats.org/drawingml/2006/main">
               <a:ext uri="{FF2B5EF4-FFF2-40B4-BE49-F238E27FC236}">
-                <a16:creationId xmlns:a16="http://schemas.microsoft.com/office/drawing/2014/main" id="{F5D92A01-B0D2-4D48-B446-95E01469414B}"/>
+                <a16:creationId xmlns:a16="http://schemas.microsoft.com/office/drawing/2014/main" id="{57358E3A-2385-406D-B529-911436702927}"/>
               </a:ext>
             </a:extLst>
           </p:cNvPr>
@@ -9629,7 +9637,7 @@
           <p:cNvPr id="11" name="">
             <a:extLst xmlns:a="http://schemas.openxmlformats.org/drawingml/2006/main">
               <a:ext uri="{FF2B5EF4-FFF2-40B4-BE49-F238E27FC236}">
-                <a16:creationId xmlns:a16="http://schemas.microsoft.com/office/drawing/2014/main" id="{118156F0-2958-4741-AACB-47D8D0C74A0D}"/>
+                <a16:creationId xmlns:a16="http://schemas.microsoft.com/office/drawing/2014/main" id="{DD280706-E9A6-407D-95F0-BEF0F9EC2E26}"/>
               </a:ext>
             </a:extLst>
           </p:cNvPr>
@@ -9686,7 +9694,7 @@
           <p:cNvPr id="12" name="">
             <a:extLst xmlns:a="http://schemas.openxmlformats.org/drawingml/2006/main">
               <a:ext uri="{FF2B5EF4-FFF2-40B4-BE49-F238E27FC236}">
-                <a16:creationId xmlns:a16="http://schemas.microsoft.com/office/drawing/2014/main" id="{D4D15DEE-C86F-4F28-B923-0B6456FA2A84}"/>
+                <a16:creationId xmlns:a16="http://schemas.microsoft.com/office/drawing/2014/main" id="{9C2587A6-A90A-4623-A4CD-5250B8D63E89}"/>
               </a:ext>
             </a:extLst>
           </p:cNvPr>
@@ -9718,7 +9726,7 @@
           <p:cNvPr id="13" name="">
             <a:extLst xmlns:a="http://schemas.openxmlformats.org/drawingml/2006/main">
               <a:ext uri="{FF2B5EF4-FFF2-40B4-BE49-F238E27FC236}">
-                <a16:creationId xmlns:a16="http://schemas.microsoft.com/office/drawing/2014/main" id="{4985C95A-5687-4CFD-9CAE-794FD2F9B478}"/>
+                <a16:creationId xmlns:a16="http://schemas.microsoft.com/office/drawing/2014/main" id="{A2889DD5-D7CA-4273-A59D-38E8C1085DE1}"/>
               </a:ext>
             </a:extLst>
           </p:cNvPr>
@@ -9775,7 +9783,7 @@
           <p:cNvPr id="14" name="">
             <a:extLst xmlns:a="http://schemas.openxmlformats.org/drawingml/2006/main">
               <a:ext uri="{FF2B5EF4-FFF2-40B4-BE49-F238E27FC236}">
-                <a16:creationId xmlns:a16="http://schemas.microsoft.com/office/drawing/2014/main" id="{C2471014-B7BF-443D-9A62-91704D3BE46A}"/>
+                <a16:creationId xmlns:a16="http://schemas.microsoft.com/office/drawing/2014/main" id="{1F763ABC-BBB4-414D-8AFA-A79DF60770C5}"/>
               </a:ext>
             </a:extLst>
           </p:cNvPr>
@@ -9830,7 +9838,7 @@
     </p:spTree>
     <p:extLst>
       <p:ext uri="{BB962C8B-B14F-4D97-AF65-F5344CB8AC3E}">
-        <p14:creationId xmlns:p14="http://schemas.microsoft.com/office/powerpoint/2010/main" val="1385774295"/>
+        <p14:creationId xmlns:p14="http://schemas.microsoft.com/office/powerpoint/2010/main" val="1392497683"/>
       </p:ext>
     </p:extLst>
   </p:cSld>
@@ -10031,7 +10039,7 @@
           <p:cNvPr id="16" name="">
             <a:extLst xmlns:a="http://schemas.openxmlformats.org/drawingml/2006/main">
               <a:ext uri="{FF2B5EF4-FFF2-40B4-BE49-F238E27FC236}">
-                <a16:creationId xmlns:a16="http://schemas.microsoft.com/office/drawing/2014/main" id="{3A862EB7-B585-49DC-8920-88C54733DB25}"/>
+                <a16:creationId xmlns:a16="http://schemas.microsoft.com/office/drawing/2014/main" id="{3217E040-0EC8-4459-9D1D-5F050574412D}"/>
               </a:ext>
             </a:extLst>
           </p:cNvPr>
@@ -10063,7 +10071,7 @@
           <p:cNvPr id="2" name="">
             <a:extLst xmlns:a="http://schemas.openxmlformats.org/drawingml/2006/main">
               <a:ext uri="{FF2B5EF4-FFF2-40B4-BE49-F238E27FC236}">
-                <a16:creationId xmlns:a16="http://schemas.microsoft.com/office/drawing/2014/main" id="{F14D29CF-2043-49F1-8DF8-6B4AF790C503}"/>
+                <a16:creationId xmlns:a16="http://schemas.microsoft.com/office/drawing/2014/main" id="{11A9EE71-89CB-434B-99ED-E02F02D65CAC}"/>
               </a:ext>
             </a:extLst>
           </p:cNvPr>
@@ -10120,7 +10128,7 @@
           <p:cNvPr id="3" name="">
             <a:extLst xmlns:a="http://schemas.openxmlformats.org/drawingml/2006/main">
               <a:ext uri="{FF2B5EF4-FFF2-40B4-BE49-F238E27FC236}">
-                <a16:creationId xmlns:a16="http://schemas.microsoft.com/office/drawing/2014/main" id="{36CF5EFF-8180-457B-87C1-8FC8424E78FC}"/>
+                <a16:creationId xmlns:a16="http://schemas.microsoft.com/office/drawing/2014/main" id="{AB182D6F-9F1B-44DA-A46B-8C7156E22F7E}"/>
               </a:ext>
             </a:extLst>
           </p:cNvPr>
@@ -10152,7 +10160,7 @@
           <p:cNvPr id="4" name="">
             <a:extLst xmlns:a="http://schemas.openxmlformats.org/drawingml/2006/main">
               <a:ext uri="{FF2B5EF4-FFF2-40B4-BE49-F238E27FC236}">
-                <a16:creationId xmlns:a16="http://schemas.microsoft.com/office/drawing/2014/main" id="{93A90D47-8A80-4101-909A-E49E0CFE34C4}"/>
+                <a16:creationId xmlns:a16="http://schemas.microsoft.com/office/drawing/2014/main" id="{BC9DA7F4-90C9-4690-BCEB-DAC430C2B58E}"/>
               </a:ext>
             </a:extLst>
           </p:cNvPr>
@@ -10209,7 +10217,7 @@
           <p:cNvPr id="5" name="">
             <a:extLst xmlns:a="http://schemas.openxmlformats.org/drawingml/2006/main">
               <a:ext uri="{FF2B5EF4-FFF2-40B4-BE49-F238E27FC236}">
-                <a16:creationId xmlns:a16="http://schemas.microsoft.com/office/drawing/2014/main" id="{2B600953-D619-417C-990B-C10B6072698D}"/>
+                <a16:creationId xmlns:a16="http://schemas.microsoft.com/office/drawing/2014/main" id="{C12DA65F-8EE5-46FE-B06A-35565D9101F3}"/>
               </a:ext>
             </a:extLst>
           </p:cNvPr>
@@ -10266,7 +10274,7 @@
           <p:cNvPr id="6" name="">
             <a:extLst xmlns:a="http://schemas.openxmlformats.org/drawingml/2006/main">
               <a:ext uri="{FF2B5EF4-FFF2-40B4-BE49-F238E27FC236}">
-                <a16:creationId xmlns:a16="http://schemas.microsoft.com/office/drawing/2014/main" id="{3A131D58-245F-4FB5-AB9E-89158D9ACC03}"/>
+                <a16:creationId xmlns:a16="http://schemas.microsoft.com/office/drawing/2014/main" id="{C7E74ED1-DA03-46FF-9638-674C718D669C}"/>
               </a:ext>
             </a:extLst>
           </p:cNvPr>
@@ -10323,7 +10331,7 @@
           <p:cNvPr id="7" name="">
             <a:extLst xmlns:a="http://schemas.openxmlformats.org/drawingml/2006/main">
               <a:ext uri="{FF2B5EF4-FFF2-40B4-BE49-F238E27FC236}">
-                <a16:creationId xmlns:a16="http://schemas.microsoft.com/office/drawing/2014/main" id="{AEC119E8-544F-4B6A-886B-BE9F92DF6AFD}"/>
+                <a16:creationId xmlns:a16="http://schemas.microsoft.com/office/drawing/2014/main" id="{2DADD809-5466-45E8-8A7F-DB8F2A48DAD2}"/>
               </a:ext>
             </a:extLst>
           </p:cNvPr>
@@ -10355,7 +10363,7 @@
           <p:cNvPr id="8" name="">
             <a:extLst xmlns:a="http://schemas.openxmlformats.org/drawingml/2006/main">
               <a:ext uri="{FF2B5EF4-FFF2-40B4-BE49-F238E27FC236}">
-                <a16:creationId xmlns:a16="http://schemas.microsoft.com/office/drawing/2014/main" id="{78B81AB4-6258-4C48-AF0B-B69F48FB094D}"/>
+                <a16:creationId xmlns:a16="http://schemas.microsoft.com/office/drawing/2014/main" id="{50A7C672-0D46-4E41-B726-323978D5ED62}"/>
               </a:ext>
             </a:extLst>
           </p:cNvPr>
@@ -10412,7 +10420,7 @@
           <p:cNvPr id="9" name="">
             <a:extLst xmlns:a="http://schemas.openxmlformats.org/drawingml/2006/main">
               <a:ext uri="{FF2B5EF4-FFF2-40B4-BE49-F238E27FC236}">
-                <a16:creationId xmlns:a16="http://schemas.microsoft.com/office/drawing/2014/main" id="{16136D6C-0F65-4CE2-A004-4349CC5DBB07}"/>
+                <a16:creationId xmlns:a16="http://schemas.microsoft.com/office/drawing/2014/main" id="{31897010-44FE-431E-AA77-FC53004E4223}"/>
               </a:ext>
             </a:extLst>
           </p:cNvPr>
@@ -10469,7 +10477,7 @@
           <p:cNvPr id="10" name="">
             <a:extLst xmlns:a="http://schemas.openxmlformats.org/drawingml/2006/main">
               <a:ext uri="{FF2B5EF4-FFF2-40B4-BE49-F238E27FC236}">
-                <a16:creationId xmlns:a16="http://schemas.microsoft.com/office/drawing/2014/main" id="{6FB15114-302F-4649-8ED0-208DC8CEEC8B}"/>
+                <a16:creationId xmlns:a16="http://schemas.microsoft.com/office/drawing/2014/main" id="{7B946E54-DA53-40F1-A4B7-5F277D2BCD8B}"/>
               </a:ext>
             </a:extLst>
           </p:cNvPr>
@@ -10526,7 +10534,7 @@
           <p:cNvPr id="11" name="">
             <a:extLst xmlns:a="http://schemas.openxmlformats.org/drawingml/2006/main">
               <a:ext uri="{FF2B5EF4-FFF2-40B4-BE49-F238E27FC236}">
-                <a16:creationId xmlns:a16="http://schemas.microsoft.com/office/drawing/2014/main" id="{257AB04E-1D25-4F74-B6C6-E25DAC3AC477}"/>
+                <a16:creationId xmlns:a16="http://schemas.microsoft.com/office/drawing/2014/main" id="{9B289FCC-5179-42D3-B44F-FD25231599A8}"/>
               </a:ext>
             </a:extLst>
           </p:cNvPr>
@@ -10583,7 +10591,7 @@
           <p:cNvPr id="12" name="">
             <a:extLst xmlns:a="http://schemas.openxmlformats.org/drawingml/2006/main">
               <a:ext uri="{FF2B5EF4-FFF2-40B4-BE49-F238E27FC236}">
-                <a16:creationId xmlns:a16="http://schemas.microsoft.com/office/drawing/2014/main" id="{34D551F4-E975-47EB-B275-39FAC5E96522}"/>
+                <a16:creationId xmlns:a16="http://schemas.microsoft.com/office/drawing/2014/main" id="{31DE962A-FDC1-4B5B-B497-FABF9637234A}"/>
               </a:ext>
             </a:extLst>
           </p:cNvPr>
@@ -10640,7 +10648,7 @@
           <p:cNvPr id="13" name="">
             <a:extLst xmlns:a="http://schemas.openxmlformats.org/drawingml/2006/main">
               <a:ext uri="{FF2B5EF4-FFF2-40B4-BE49-F238E27FC236}">
-                <a16:creationId xmlns:a16="http://schemas.microsoft.com/office/drawing/2014/main" id="{8CDCC3EB-7867-498F-B2C5-1F1522E3DF7C}"/>
+                <a16:creationId xmlns:a16="http://schemas.microsoft.com/office/drawing/2014/main" id="{D1946D0E-09B7-45CF-9A7B-A74797A11267}"/>
               </a:ext>
             </a:extLst>
           </p:cNvPr>
@@ -10697,7 +10705,7 @@
           <p:cNvPr id="14" name="">
             <a:extLst xmlns:a="http://schemas.openxmlformats.org/drawingml/2006/main">
               <a:ext uri="{FF2B5EF4-FFF2-40B4-BE49-F238E27FC236}">
-                <a16:creationId xmlns:a16="http://schemas.microsoft.com/office/drawing/2014/main" id="{C212D160-C364-49CB-9957-68C9143D79A9}"/>
+                <a16:creationId xmlns:a16="http://schemas.microsoft.com/office/drawing/2014/main" id="{0112FE1B-D5ED-4DEC-91AA-9A2ADF455C29}"/>
               </a:ext>
             </a:extLst>
           </p:cNvPr>
@@ -10754,7 +10762,7 @@
           <p:cNvPr id="15" name="">
             <a:extLst xmlns:a="http://schemas.openxmlformats.org/drawingml/2006/main">
               <a:ext uri="{FF2B5EF4-FFF2-40B4-BE49-F238E27FC236}">
-                <a16:creationId xmlns:a16="http://schemas.microsoft.com/office/drawing/2014/main" id="{1886E8C5-5D6C-44AB-879E-426B907C47EF}"/>
+                <a16:creationId xmlns:a16="http://schemas.microsoft.com/office/drawing/2014/main" id="{43303963-57ED-4C60-BD1D-F5C4D6A2AAE5}"/>
               </a:ext>
             </a:extLst>
           </p:cNvPr>
@@ -10809,7 +10817,7 @@
     </p:spTree>
     <p:extLst>
       <p:ext uri="{BB962C8B-B14F-4D97-AF65-F5344CB8AC3E}">
-        <p14:creationId xmlns:p14="http://schemas.microsoft.com/office/powerpoint/2010/main" val="1802226715"/>
+        <p14:creationId xmlns:p14="http://schemas.microsoft.com/office/powerpoint/2010/main" val="1169784968"/>
       </p:ext>
     </p:extLst>
   </p:cSld>
@@ -10964,7 +10972,7 @@
           <p:cNvPr id="16" name="">
             <a:extLst xmlns:a="http://schemas.openxmlformats.org/drawingml/2006/main">
               <a:ext uri="{FF2B5EF4-FFF2-40B4-BE49-F238E27FC236}">
-                <a16:creationId xmlns:a16="http://schemas.microsoft.com/office/drawing/2014/main" id="{828E6700-4C9F-403C-996F-E1ADDD498AE1}"/>
+                <a16:creationId xmlns:a16="http://schemas.microsoft.com/office/drawing/2014/main" id="{5D6EE803-D17D-42F3-A971-777B78E782BF}"/>
               </a:ext>
             </a:extLst>
           </p:cNvPr>
@@ -10996,7 +11004,7 @@
           <p:cNvPr id="2" name="">
             <a:extLst xmlns:a="http://schemas.openxmlformats.org/drawingml/2006/main">
               <a:ext uri="{FF2B5EF4-FFF2-40B4-BE49-F238E27FC236}">
-                <a16:creationId xmlns:a16="http://schemas.microsoft.com/office/drawing/2014/main" id="{7F3E7D7B-B6F6-4467-BC9F-9D0CE2C1BD15}"/>
+                <a16:creationId xmlns:a16="http://schemas.microsoft.com/office/drawing/2014/main" id="{D54F7001-F5FB-45D6-A1FE-4297B272EAA4}"/>
               </a:ext>
             </a:extLst>
           </p:cNvPr>
@@ -11053,7 +11061,7 @@
           <p:cNvPr id="3" name="">
             <a:extLst xmlns:a="http://schemas.openxmlformats.org/drawingml/2006/main">
               <a:ext uri="{FF2B5EF4-FFF2-40B4-BE49-F238E27FC236}">
-                <a16:creationId xmlns:a16="http://schemas.microsoft.com/office/drawing/2014/main" id="{7B190EF5-AE73-4500-B632-4DAE087F54C7}"/>
+                <a16:creationId xmlns:a16="http://schemas.microsoft.com/office/drawing/2014/main" id="{497E4F58-9B6E-4F38-BE66-72DB4AE0F142}"/>
               </a:ext>
             </a:extLst>
           </p:cNvPr>
@@ -11085,7 +11093,7 @@
           <p:cNvPr id="4" name="">
             <a:extLst xmlns:a="http://schemas.openxmlformats.org/drawingml/2006/main">
               <a:ext uri="{FF2B5EF4-FFF2-40B4-BE49-F238E27FC236}">
-                <a16:creationId xmlns:a16="http://schemas.microsoft.com/office/drawing/2014/main" id="{BD6E1954-A8E6-47A9-850B-4642AF641F77}"/>
+                <a16:creationId xmlns:a16="http://schemas.microsoft.com/office/drawing/2014/main" id="{D8C50234-877C-47A2-AF87-9E9956E54066}"/>
               </a:ext>
             </a:extLst>
           </p:cNvPr>
@@ -11142,7 +11150,7 @@
           <p:cNvPr id="5" name="">
             <a:extLst xmlns:a="http://schemas.openxmlformats.org/drawingml/2006/main">
               <a:ext uri="{FF2B5EF4-FFF2-40B4-BE49-F238E27FC236}">
-                <a16:creationId xmlns:a16="http://schemas.microsoft.com/office/drawing/2014/main" id="{324F3A59-14B4-47E9-8C6A-C9706B419031}"/>
+                <a16:creationId xmlns:a16="http://schemas.microsoft.com/office/drawing/2014/main" id="{89C8761D-0009-4DB4-BD6C-59E560B510DD}"/>
               </a:ext>
             </a:extLst>
           </p:cNvPr>
@@ -11199,7 +11207,7 @@
           <p:cNvPr id="6" name="">
             <a:extLst xmlns:a="http://schemas.openxmlformats.org/drawingml/2006/main">
               <a:ext uri="{FF2B5EF4-FFF2-40B4-BE49-F238E27FC236}">
-                <a16:creationId xmlns:a16="http://schemas.microsoft.com/office/drawing/2014/main" id="{76D822C8-43EC-4EFB-8C40-621C3BC542A7}"/>
+                <a16:creationId xmlns:a16="http://schemas.microsoft.com/office/drawing/2014/main" id="{27F2478D-8BBB-4F59-9094-A8AB5D223FB1}"/>
               </a:ext>
             </a:extLst>
           </p:cNvPr>
@@ -11256,7 +11264,7 @@
           <p:cNvPr id="7" name="">
             <a:extLst xmlns:a="http://schemas.openxmlformats.org/drawingml/2006/main">
               <a:ext uri="{FF2B5EF4-FFF2-40B4-BE49-F238E27FC236}">
-                <a16:creationId xmlns:a16="http://schemas.microsoft.com/office/drawing/2014/main" id="{4F31B7D0-BD3B-4E0D-9E12-30CEA1F56F3E}"/>
+                <a16:creationId xmlns:a16="http://schemas.microsoft.com/office/drawing/2014/main" id="{C3C46B6C-7068-4830-8429-CEE07B1B65F4}"/>
               </a:ext>
             </a:extLst>
           </p:cNvPr>
@@ -11288,7 +11296,7 @@
           <p:cNvPr id="8" name="">
             <a:extLst xmlns:a="http://schemas.openxmlformats.org/drawingml/2006/main">
               <a:ext uri="{FF2B5EF4-FFF2-40B4-BE49-F238E27FC236}">
-                <a16:creationId xmlns:a16="http://schemas.microsoft.com/office/drawing/2014/main" id="{C234C838-BFAF-4506-B54B-34242DA27380}"/>
+                <a16:creationId xmlns:a16="http://schemas.microsoft.com/office/drawing/2014/main" id="{15B56367-5EE5-474F-88FA-A41FA76884F8}"/>
               </a:ext>
             </a:extLst>
           </p:cNvPr>
@@ -11345,7 +11353,7 @@
           <p:cNvPr id="9" name="">
             <a:extLst xmlns:a="http://schemas.openxmlformats.org/drawingml/2006/main">
               <a:ext uri="{FF2B5EF4-FFF2-40B4-BE49-F238E27FC236}">
-                <a16:creationId xmlns:a16="http://schemas.microsoft.com/office/drawing/2014/main" id="{AC42AE70-3610-407A-81F1-95612AFD53F6}"/>
+                <a16:creationId xmlns:a16="http://schemas.microsoft.com/office/drawing/2014/main" id="{A444CBF6-AC6D-4E4C-BAA6-E2DC0ECA1A96}"/>
               </a:ext>
             </a:extLst>
           </p:cNvPr>
@@ -11406,7 +11414,7 @@
           <p:nvPr/>
         </p:nvPicPr>
         <p:blipFill>
-          <a:blip xmlns:r="http://schemas.openxmlformats.org/officeDocument/2006/relationships" xmlns:a="http://schemas.openxmlformats.org/drawingml/2006/main" r:embed="Re698e75c9c044fbe"/>
+          <a:blip xmlns:r="http://schemas.openxmlformats.org/officeDocument/2006/relationships" xmlns:a="http://schemas.openxmlformats.org/drawingml/2006/main" r:embed="R525d90eb98e6449b"/>
           <a:stretch xmlns:a="http://schemas.openxmlformats.org/drawingml/2006/main"/>
         </p:blipFill>
         <p:spPr>
@@ -11424,7 +11432,7 @@
           <p:cNvPr id="11" name="">
             <a:extLst xmlns:a="http://schemas.openxmlformats.org/drawingml/2006/main">
               <a:ext uri="{FF2B5EF4-FFF2-40B4-BE49-F238E27FC236}">
-                <a16:creationId xmlns:a16="http://schemas.microsoft.com/office/drawing/2014/main" id="{662B9882-F009-4860-BC56-4B8986831D67}"/>
+                <a16:creationId xmlns:a16="http://schemas.microsoft.com/office/drawing/2014/main" id="{B52FB2D6-A63C-41D6-8A63-29B7EAC7B1BD}"/>
               </a:ext>
             </a:extLst>
           </p:cNvPr>
@@ -11481,7 +11489,7 @@
           <p:cNvPr id="12" name="">
             <a:extLst xmlns:a="http://schemas.openxmlformats.org/drawingml/2006/main">
               <a:ext uri="{FF2B5EF4-FFF2-40B4-BE49-F238E27FC236}">
-                <a16:creationId xmlns:a16="http://schemas.microsoft.com/office/drawing/2014/main" id="{24EBC06E-ABB5-48B7-8FEE-369AC67A98A3}"/>
+                <a16:creationId xmlns:a16="http://schemas.microsoft.com/office/drawing/2014/main" id="{DAFC253A-5DDF-43DB-9B97-25E2ACD29499}"/>
               </a:ext>
             </a:extLst>
           </p:cNvPr>
@@ -11538,7 +11546,7 @@
           <p:cNvPr id="13" name="">
             <a:extLst xmlns:a="http://schemas.openxmlformats.org/drawingml/2006/main">
               <a:ext uri="{FF2B5EF4-FFF2-40B4-BE49-F238E27FC236}">
-                <a16:creationId xmlns:a16="http://schemas.microsoft.com/office/drawing/2014/main" id="{97DD3883-A7D5-4DF6-B064-6769A0B572B2}"/>
+                <a16:creationId xmlns:a16="http://schemas.microsoft.com/office/drawing/2014/main" id="{49732F98-9BDD-4496-9791-E75EADA0519C}"/>
               </a:ext>
             </a:extLst>
           </p:cNvPr>
@@ -11570,7 +11578,7 @@
           <p:cNvPr id="14" name="">
             <a:extLst xmlns:a="http://schemas.openxmlformats.org/drawingml/2006/main">
               <a:ext uri="{FF2B5EF4-FFF2-40B4-BE49-F238E27FC236}">
-                <a16:creationId xmlns:a16="http://schemas.microsoft.com/office/drawing/2014/main" id="{7CE1265C-CB7D-436F-A8ED-C28E623CE9AA}"/>
+                <a16:creationId xmlns:a16="http://schemas.microsoft.com/office/drawing/2014/main" id="{2C4C8564-B4B9-456B-8B52-907699FA43C0}"/>
               </a:ext>
             </a:extLst>
           </p:cNvPr>
@@ -11627,7 +11635,7 @@
           <p:cNvPr id="15" name="">
             <a:extLst xmlns:a="http://schemas.openxmlformats.org/drawingml/2006/main">
               <a:ext uri="{FF2B5EF4-FFF2-40B4-BE49-F238E27FC236}">
-                <a16:creationId xmlns:a16="http://schemas.microsoft.com/office/drawing/2014/main" id="{20CCDA4B-82FD-4871-BDDE-DF02F8975839}"/>
+                <a16:creationId xmlns:a16="http://schemas.microsoft.com/office/drawing/2014/main" id="{F3F052DE-C8E0-4A53-9B56-858569C3D676}"/>
               </a:ext>
             </a:extLst>
           </p:cNvPr>
@@ -11682,7 +11690,7 @@
     </p:spTree>
     <p:extLst>
       <p:ext uri="{BB962C8B-B14F-4D97-AF65-F5344CB8AC3E}">
-        <p14:creationId xmlns:p14="http://schemas.microsoft.com/office/powerpoint/2010/main" val="1811548323"/>
+        <p14:creationId xmlns:p14="http://schemas.microsoft.com/office/powerpoint/2010/main" val="510417682"/>
       </p:ext>
     </p:extLst>
   </p:cSld>
@@ -11837,7 +11845,7 @@
           <p:cNvPr id="23" name="">
             <a:extLst xmlns:a="http://schemas.openxmlformats.org/drawingml/2006/main">
               <a:ext uri="{FF2B5EF4-FFF2-40B4-BE49-F238E27FC236}">
-                <a16:creationId xmlns:a16="http://schemas.microsoft.com/office/drawing/2014/main" id="{E5A52059-6E62-4622-98EB-738A800B381B}"/>
+                <a16:creationId xmlns:a16="http://schemas.microsoft.com/office/drawing/2014/main" id="{3F9C223E-2C24-4EDC-AA05-F357556287EF}"/>
               </a:ext>
             </a:extLst>
           </p:cNvPr>
@@ -11869,7 +11877,7 @@
           <p:cNvPr id="2" name="">
             <a:extLst xmlns:a="http://schemas.openxmlformats.org/drawingml/2006/main">
               <a:ext uri="{FF2B5EF4-FFF2-40B4-BE49-F238E27FC236}">
-                <a16:creationId xmlns:a16="http://schemas.microsoft.com/office/drawing/2014/main" id="{12BB0557-7B87-4BF8-815F-12D8A560261D}"/>
+                <a16:creationId xmlns:a16="http://schemas.microsoft.com/office/drawing/2014/main" id="{A8C7EACC-7207-4DD5-85C7-77AAE9C616BD}"/>
               </a:ext>
             </a:extLst>
           </p:cNvPr>
@@ -11926,7 +11934,7 @@
           <p:cNvPr id="3" name="">
             <a:extLst xmlns:a="http://schemas.openxmlformats.org/drawingml/2006/main">
               <a:ext uri="{FF2B5EF4-FFF2-40B4-BE49-F238E27FC236}">
-                <a16:creationId xmlns:a16="http://schemas.microsoft.com/office/drawing/2014/main" id="{432B0DC0-6EBD-420C-8EE8-0A0913E54125}"/>
+                <a16:creationId xmlns:a16="http://schemas.microsoft.com/office/drawing/2014/main" id="{139D56DA-9622-4A4A-9627-EE858FA44228}"/>
               </a:ext>
             </a:extLst>
           </p:cNvPr>
@@ -11958,7 +11966,7 @@
           <p:cNvPr id="4" name="">
             <a:extLst xmlns:a="http://schemas.openxmlformats.org/drawingml/2006/main">
               <a:ext uri="{FF2B5EF4-FFF2-40B4-BE49-F238E27FC236}">
-                <a16:creationId xmlns:a16="http://schemas.microsoft.com/office/drawing/2014/main" id="{99163C89-5C68-4263-8FD4-778E0031BDE1}"/>
+                <a16:creationId xmlns:a16="http://schemas.microsoft.com/office/drawing/2014/main" id="{08FA5A85-343F-4634-8D15-09741FD0959A}"/>
               </a:ext>
             </a:extLst>
           </p:cNvPr>
@@ -12015,7 +12023,7 @@
           <p:cNvPr id="5" name="">
             <a:extLst xmlns:a="http://schemas.openxmlformats.org/drawingml/2006/main">
               <a:ext uri="{FF2B5EF4-FFF2-40B4-BE49-F238E27FC236}">
-                <a16:creationId xmlns:a16="http://schemas.microsoft.com/office/drawing/2014/main" id="{6FC370E0-18B8-4616-87E5-E33CFAE550EA}"/>
+                <a16:creationId xmlns:a16="http://schemas.microsoft.com/office/drawing/2014/main" id="{D5901B79-8EC5-4C17-B91A-E598A5B4187D}"/>
               </a:ext>
             </a:extLst>
           </p:cNvPr>
@@ -12072,7 +12080,7 @@
           <p:cNvPr id="6" name="">
             <a:extLst xmlns:a="http://schemas.openxmlformats.org/drawingml/2006/main">
               <a:ext uri="{FF2B5EF4-FFF2-40B4-BE49-F238E27FC236}">
-                <a16:creationId xmlns:a16="http://schemas.microsoft.com/office/drawing/2014/main" id="{E5AB96B1-5BAC-4964-AAC9-1AF97CFC4A23}"/>
+                <a16:creationId xmlns:a16="http://schemas.microsoft.com/office/drawing/2014/main" id="{F8031663-E78B-4B9A-B246-BA383E8ED860}"/>
               </a:ext>
             </a:extLst>
           </p:cNvPr>
@@ -12129,7 +12137,7 @@
           <p:cNvPr id="7" name="">
             <a:extLst xmlns:a="http://schemas.openxmlformats.org/drawingml/2006/main">
               <a:ext uri="{FF2B5EF4-FFF2-40B4-BE49-F238E27FC236}">
-                <a16:creationId xmlns:a16="http://schemas.microsoft.com/office/drawing/2014/main" id="{2F84AC16-A2C2-4F67-8E82-C9935DBB9951}"/>
+                <a16:creationId xmlns:a16="http://schemas.microsoft.com/office/drawing/2014/main" id="{DD818389-6233-49DD-A5BE-E99AB66F5090}"/>
               </a:ext>
             </a:extLst>
           </p:cNvPr>
@@ -12161,7 +12169,7 @@
           <p:cNvPr id="8" name="">
             <a:extLst xmlns:a="http://schemas.openxmlformats.org/drawingml/2006/main">
               <a:ext uri="{FF2B5EF4-FFF2-40B4-BE49-F238E27FC236}">
-                <a16:creationId xmlns:a16="http://schemas.microsoft.com/office/drawing/2014/main" id="{5EADF895-4027-4D52-A154-06DF39BB4296}"/>
+                <a16:creationId xmlns:a16="http://schemas.microsoft.com/office/drawing/2014/main" id="{DCD4F543-6590-4C3B-A1B2-66647F766BC7}"/>
               </a:ext>
             </a:extLst>
           </p:cNvPr>
@@ -12218,7 +12226,7 @@
           <p:cNvPr id="9" name="">
             <a:extLst xmlns:a="http://schemas.openxmlformats.org/drawingml/2006/main">
               <a:ext uri="{FF2B5EF4-FFF2-40B4-BE49-F238E27FC236}">
-                <a16:creationId xmlns:a16="http://schemas.microsoft.com/office/drawing/2014/main" id="{5705DC0C-EB64-492F-AC4D-786E1DC57C2E}"/>
+                <a16:creationId xmlns:a16="http://schemas.microsoft.com/office/drawing/2014/main" id="{5B87C634-26BD-44BC-A2BB-EA18FE72BD5D}"/>
               </a:ext>
             </a:extLst>
           </p:cNvPr>
@@ -12275,7 +12283,7 @@
           <p:cNvPr id="10" name="">
             <a:extLst xmlns:a="http://schemas.openxmlformats.org/drawingml/2006/main">
               <a:ext uri="{FF2B5EF4-FFF2-40B4-BE49-F238E27FC236}">
-                <a16:creationId xmlns:a16="http://schemas.microsoft.com/office/drawing/2014/main" id="{26A26E91-374E-4C48-9EF2-F6377D193AD7}"/>
+                <a16:creationId xmlns:a16="http://schemas.microsoft.com/office/drawing/2014/main" id="{3D37F426-E7AB-4D33-9AFA-B1FF2F8BA7A9}"/>
               </a:ext>
             </a:extLst>
           </p:cNvPr>
@@ -12309,7 +12317,7 @@
           <p:cNvPr id="11" name="">
             <a:extLst xmlns:a="http://schemas.openxmlformats.org/drawingml/2006/main">
               <a:ext uri="{FF2B5EF4-FFF2-40B4-BE49-F238E27FC236}">
-                <a16:creationId xmlns:a16="http://schemas.microsoft.com/office/drawing/2014/main" id="{DB44AE8F-FFDA-40BD-8F8A-E2A1D3D1886A}"/>
+                <a16:creationId xmlns:a16="http://schemas.microsoft.com/office/drawing/2014/main" id="{F7FBC21E-B7B6-428F-9F37-7B6087D97EC3}"/>
               </a:ext>
             </a:extLst>
           </p:cNvPr>
@@ -12341,7 +12349,7 @@
           <p:cNvPr id="12" name="">
             <a:extLst xmlns:a="http://schemas.openxmlformats.org/drawingml/2006/main">
               <a:ext uri="{FF2B5EF4-FFF2-40B4-BE49-F238E27FC236}">
-                <a16:creationId xmlns:a16="http://schemas.microsoft.com/office/drawing/2014/main" id="{D28AE20F-F416-488B-A79B-16586A08C908}"/>
+                <a16:creationId xmlns:a16="http://schemas.microsoft.com/office/drawing/2014/main" id="{80D289B8-1952-4FA3-8DA9-C35E89143F14}"/>
               </a:ext>
             </a:extLst>
           </p:cNvPr>
@@ -12398,7 +12406,7 @@
           <p:cNvPr id="13" name="">
             <a:extLst xmlns:a="http://schemas.openxmlformats.org/drawingml/2006/main">
               <a:ext uri="{FF2B5EF4-FFF2-40B4-BE49-F238E27FC236}">
-                <a16:creationId xmlns:a16="http://schemas.microsoft.com/office/drawing/2014/main" id="{EAE6A982-7E8A-4430-973A-EE0BCAD7C765}"/>
+                <a16:creationId xmlns:a16="http://schemas.microsoft.com/office/drawing/2014/main" id="{E8F74FFF-D8E9-45A7-9B12-81F1CC4BA975}"/>
               </a:ext>
             </a:extLst>
           </p:cNvPr>
@@ -12455,7 +12463,7 @@
           <p:cNvPr id="14" name="">
             <a:extLst xmlns:a="http://schemas.openxmlformats.org/drawingml/2006/main">
               <a:ext uri="{FF2B5EF4-FFF2-40B4-BE49-F238E27FC236}">
-                <a16:creationId xmlns:a16="http://schemas.microsoft.com/office/drawing/2014/main" id="{D2399B19-A63F-4DE8-92AB-A8BC0543DF38}"/>
+                <a16:creationId xmlns:a16="http://schemas.microsoft.com/office/drawing/2014/main" id="{9BD4EAA3-0287-4F45-A396-A1ECEB3F0535}"/>
               </a:ext>
             </a:extLst>
           </p:cNvPr>
@@ -12489,7 +12497,7 @@
           <p:cNvPr id="15" name="">
             <a:extLst xmlns:a="http://schemas.openxmlformats.org/drawingml/2006/main">
               <a:ext uri="{FF2B5EF4-FFF2-40B4-BE49-F238E27FC236}">
-                <a16:creationId xmlns:a16="http://schemas.microsoft.com/office/drawing/2014/main" id="{C4BFB82D-255A-4309-90B6-D19F71A3351C}"/>
+                <a16:creationId xmlns:a16="http://schemas.microsoft.com/office/drawing/2014/main" id="{98C8002E-BD2B-4313-9705-5C1192CED11E}"/>
               </a:ext>
             </a:extLst>
           </p:cNvPr>
@@ -12521,7 +12529,7 @@
           <p:cNvPr id="16" name="">
             <a:extLst xmlns:a="http://schemas.openxmlformats.org/drawingml/2006/main">
               <a:ext uri="{FF2B5EF4-FFF2-40B4-BE49-F238E27FC236}">
-                <a16:creationId xmlns:a16="http://schemas.microsoft.com/office/drawing/2014/main" id="{3CB9A7DD-0A6B-45CE-861C-2ACB67420D3F}"/>
+                <a16:creationId xmlns:a16="http://schemas.microsoft.com/office/drawing/2014/main" id="{09AFBCB5-D45B-4613-8617-A6BDB14EE2CD}"/>
               </a:ext>
             </a:extLst>
           </p:cNvPr>
@@ -12578,7 +12586,7 @@
           <p:cNvPr id="17" name="">
             <a:extLst xmlns:a="http://schemas.openxmlformats.org/drawingml/2006/main">
               <a:ext uri="{FF2B5EF4-FFF2-40B4-BE49-F238E27FC236}">
-                <a16:creationId xmlns:a16="http://schemas.microsoft.com/office/drawing/2014/main" id="{B63D0D7C-CA00-46BA-9ED8-FDBD1F60E52C}"/>
+                <a16:creationId xmlns:a16="http://schemas.microsoft.com/office/drawing/2014/main" id="{5DBB53E6-D6B1-43C6-8CEC-724D8413590C}"/>
               </a:ext>
             </a:extLst>
           </p:cNvPr>
@@ -12635,7 +12643,7 @@
           <p:cNvPr id="18" name="">
             <a:extLst xmlns:a="http://schemas.openxmlformats.org/drawingml/2006/main">
               <a:ext uri="{FF2B5EF4-FFF2-40B4-BE49-F238E27FC236}">
-                <a16:creationId xmlns:a16="http://schemas.microsoft.com/office/drawing/2014/main" id="{648D2651-FC21-4C0E-92B2-4552613F6C3B}"/>
+                <a16:creationId xmlns:a16="http://schemas.microsoft.com/office/drawing/2014/main" id="{BDCF8907-2592-48D4-88BC-79BA2559A6AB}"/>
               </a:ext>
             </a:extLst>
           </p:cNvPr>
@@ -12669,7 +12677,7 @@
           <p:cNvPr id="19" name="">
             <a:extLst xmlns:a="http://schemas.openxmlformats.org/drawingml/2006/main">
               <a:ext uri="{FF2B5EF4-FFF2-40B4-BE49-F238E27FC236}">
-                <a16:creationId xmlns:a16="http://schemas.microsoft.com/office/drawing/2014/main" id="{83F1F7F8-B9A2-46BE-B92A-7E3219D30D92}"/>
+                <a16:creationId xmlns:a16="http://schemas.microsoft.com/office/drawing/2014/main" id="{16896468-6240-445B-892A-ECEA2BD9FE61}"/>
               </a:ext>
             </a:extLst>
           </p:cNvPr>
@@ -12701,7 +12709,7 @@
           <p:cNvPr id="20" name="">
             <a:extLst xmlns:a="http://schemas.openxmlformats.org/drawingml/2006/main">
               <a:ext uri="{FF2B5EF4-FFF2-40B4-BE49-F238E27FC236}">
-                <a16:creationId xmlns:a16="http://schemas.microsoft.com/office/drawing/2014/main" id="{5CA6535C-DEAB-4E24-A5C3-2E2EBBF447B0}"/>
+                <a16:creationId xmlns:a16="http://schemas.microsoft.com/office/drawing/2014/main" id="{26EC37C9-BFD7-44B0-A9E5-09358B548635}"/>
               </a:ext>
             </a:extLst>
           </p:cNvPr>
@@ -12758,7 +12766,7 @@
           <p:cNvPr id="21" name="">
             <a:extLst xmlns:a="http://schemas.openxmlformats.org/drawingml/2006/main">
               <a:ext uri="{FF2B5EF4-FFF2-40B4-BE49-F238E27FC236}">
-                <a16:creationId xmlns:a16="http://schemas.microsoft.com/office/drawing/2014/main" id="{B47C2C66-AD6B-49E6-A28F-CCDCECCDDA3C}"/>
+                <a16:creationId xmlns:a16="http://schemas.microsoft.com/office/drawing/2014/main" id="{7568CCEA-21F4-4115-93C2-9BFE4848FB41}"/>
               </a:ext>
             </a:extLst>
           </p:cNvPr>
@@ -12815,7 +12823,7 @@
           <p:cNvPr id="22" name="">
             <a:extLst xmlns:a="http://schemas.openxmlformats.org/drawingml/2006/main">
               <a:ext uri="{FF2B5EF4-FFF2-40B4-BE49-F238E27FC236}">
-                <a16:creationId xmlns:a16="http://schemas.microsoft.com/office/drawing/2014/main" id="{8376AC16-2744-453A-AF92-CEBC8B70AEDD}"/>
+                <a16:creationId xmlns:a16="http://schemas.microsoft.com/office/drawing/2014/main" id="{ABD66CD7-F6A6-4F91-B6E9-01C9C143F490}"/>
               </a:ext>
             </a:extLst>
           </p:cNvPr>
@@ -12870,7 +12878,7 @@
     </p:spTree>
     <p:extLst>
       <p:ext uri="{BB962C8B-B14F-4D97-AF65-F5344CB8AC3E}">
-        <p14:creationId xmlns:p14="http://schemas.microsoft.com/office/powerpoint/2010/main" val="421214770"/>
+        <p14:creationId xmlns:p14="http://schemas.microsoft.com/office/powerpoint/2010/main" val="1858031465"/>
       </p:ext>
     </p:extLst>
   </p:cSld>
@@ -13071,7 +13079,7 @@
           <p:cNvPr id="22" name="">
             <a:extLst xmlns:a="http://schemas.openxmlformats.org/drawingml/2006/main">
               <a:ext uri="{FF2B5EF4-FFF2-40B4-BE49-F238E27FC236}">
-                <a16:creationId xmlns:a16="http://schemas.microsoft.com/office/drawing/2014/main" id="{B6A312CF-2D30-4956-B627-4E7C76A76C7D}"/>
+                <a16:creationId xmlns:a16="http://schemas.microsoft.com/office/drawing/2014/main" id="{0A4E411D-1BAA-4A8F-99B4-939F70E2B882}"/>
               </a:ext>
             </a:extLst>
           </p:cNvPr>
@@ -13103,7 +13111,7 @@
           <p:cNvPr id="2" name="">
             <a:extLst xmlns:a="http://schemas.openxmlformats.org/drawingml/2006/main">
               <a:ext uri="{FF2B5EF4-FFF2-40B4-BE49-F238E27FC236}">
-                <a16:creationId xmlns:a16="http://schemas.microsoft.com/office/drawing/2014/main" id="{9EA76FFC-840B-4E58-9760-BFDF4D3F7E76}"/>
+                <a16:creationId xmlns:a16="http://schemas.microsoft.com/office/drawing/2014/main" id="{AAF0061B-C621-43AF-92DB-87F60CF9804F}"/>
               </a:ext>
             </a:extLst>
           </p:cNvPr>
@@ -13160,7 +13168,7 @@
           <p:cNvPr id="3" name="">
             <a:extLst xmlns:a="http://schemas.openxmlformats.org/drawingml/2006/main">
               <a:ext uri="{FF2B5EF4-FFF2-40B4-BE49-F238E27FC236}">
-                <a16:creationId xmlns:a16="http://schemas.microsoft.com/office/drawing/2014/main" id="{A98ABFFE-1103-4074-B5F3-2C6CD5C1D65F}"/>
+                <a16:creationId xmlns:a16="http://schemas.microsoft.com/office/drawing/2014/main" id="{A263D81C-9C8A-4703-BFAE-668180BA888E}"/>
               </a:ext>
             </a:extLst>
           </p:cNvPr>
@@ -13192,7 +13200,7 @@
           <p:cNvPr id="4" name="">
             <a:extLst xmlns:a="http://schemas.openxmlformats.org/drawingml/2006/main">
               <a:ext uri="{FF2B5EF4-FFF2-40B4-BE49-F238E27FC236}">
-                <a16:creationId xmlns:a16="http://schemas.microsoft.com/office/drawing/2014/main" id="{77771B75-CA9A-45E0-8D64-CB96A29D10F4}"/>
+                <a16:creationId xmlns:a16="http://schemas.microsoft.com/office/drawing/2014/main" id="{5433712D-9CC3-4252-8E62-0418DB3D0A7A}"/>
               </a:ext>
             </a:extLst>
           </p:cNvPr>
@@ -13249,7 +13257,7 @@
           <p:cNvPr id="5" name="">
             <a:extLst xmlns:a="http://schemas.openxmlformats.org/drawingml/2006/main">
               <a:ext uri="{FF2B5EF4-FFF2-40B4-BE49-F238E27FC236}">
-                <a16:creationId xmlns:a16="http://schemas.microsoft.com/office/drawing/2014/main" id="{24C7A118-B599-4600-A23A-F60AE94CD06C}"/>
+                <a16:creationId xmlns:a16="http://schemas.microsoft.com/office/drawing/2014/main" id="{90CC6476-39C0-4321-8515-D53B0848EA6A}"/>
               </a:ext>
             </a:extLst>
           </p:cNvPr>
@@ -13306,7 +13314,7 @@
           <p:cNvPr id="6" name="">
             <a:extLst xmlns:a="http://schemas.openxmlformats.org/drawingml/2006/main">
               <a:ext uri="{FF2B5EF4-FFF2-40B4-BE49-F238E27FC236}">
-                <a16:creationId xmlns:a16="http://schemas.microsoft.com/office/drawing/2014/main" id="{8CEF7B1D-195D-4EF4-9E88-2570DD4B67AC}"/>
+                <a16:creationId xmlns:a16="http://schemas.microsoft.com/office/drawing/2014/main" id="{699CB2AD-E19D-449D-A3B0-6E789D2BA0A8}"/>
               </a:ext>
             </a:extLst>
           </p:cNvPr>
@@ -13363,7 +13371,7 @@
           <p:cNvPr id="7" name="">
             <a:extLst xmlns:a="http://schemas.openxmlformats.org/drawingml/2006/main">
               <a:ext uri="{FF2B5EF4-FFF2-40B4-BE49-F238E27FC236}">
-                <a16:creationId xmlns:a16="http://schemas.microsoft.com/office/drawing/2014/main" id="{DF069E55-07B0-4BF3-AA37-D62CF41E3AF7}"/>
+                <a16:creationId xmlns:a16="http://schemas.microsoft.com/office/drawing/2014/main" id="{28CA1326-643A-47F5-9A86-23DF7A691203}"/>
               </a:ext>
             </a:extLst>
           </p:cNvPr>
@@ -13395,7 +13403,7 @@
           <p:cNvPr id="8" name="">
             <a:extLst xmlns:a="http://schemas.openxmlformats.org/drawingml/2006/main">
               <a:ext uri="{FF2B5EF4-FFF2-40B4-BE49-F238E27FC236}">
-                <a16:creationId xmlns:a16="http://schemas.microsoft.com/office/drawing/2014/main" id="{84C2E7F1-34C4-4DAC-BAF2-56F785073146}"/>
+                <a16:creationId xmlns:a16="http://schemas.microsoft.com/office/drawing/2014/main" id="{22B4D566-7570-456D-9207-C285BFCC8549}"/>
               </a:ext>
             </a:extLst>
           </p:cNvPr>
@@ -13452,7 +13460,7 @@
           <p:cNvPr id="9" name="">
             <a:extLst xmlns:a="http://schemas.openxmlformats.org/drawingml/2006/main">
               <a:ext uri="{FF2B5EF4-FFF2-40B4-BE49-F238E27FC236}">
-                <a16:creationId xmlns:a16="http://schemas.microsoft.com/office/drawing/2014/main" id="{3051EB99-5AB1-4996-974A-F2101890AB0E}"/>
+                <a16:creationId xmlns:a16="http://schemas.microsoft.com/office/drawing/2014/main" id="{FD550043-9DF4-4E49-877C-DC13092573C2}"/>
               </a:ext>
             </a:extLst>
           </p:cNvPr>
@@ -13509,7 +13517,7 @@
           <p:cNvPr id="10" name="">
             <a:extLst xmlns:a="http://schemas.openxmlformats.org/drawingml/2006/main">
               <a:ext uri="{FF2B5EF4-FFF2-40B4-BE49-F238E27FC236}">
-                <a16:creationId xmlns:a16="http://schemas.microsoft.com/office/drawing/2014/main" id="{2732424A-1369-4DA7-96EE-1126F456C9BF}"/>
+                <a16:creationId xmlns:a16="http://schemas.microsoft.com/office/drawing/2014/main" id="{58455061-F603-4AF8-999B-133D3263D92B}"/>
               </a:ext>
             </a:extLst>
           </p:cNvPr>
@@ -13543,7 +13551,7 @@
           <p:cNvPr id="11" name="">
             <a:extLst xmlns:a="http://schemas.openxmlformats.org/drawingml/2006/main">
               <a:ext uri="{FF2B5EF4-FFF2-40B4-BE49-F238E27FC236}">
-                <a16:creationId xmlns:a16="http://schemas.microsoft.com/office/drawing/2014/main" id="{0A5B30C1-12D1-40DB-98EB-9B6AE52F5250}"/>
+                <a16:creationId xmlns:a16="http://schemas.microsoft.com/office/drawing/2014/main" id="{FEA3AA1D-831D-4697-B190-64E09EB41BEB}"/>
               </a:ext>
             </a:extLst>
           </p:cNvPr>
@@ -13575,7 +13583,7 @@
           <p:cNvPr id="12" name="">
             <a:extLst xmlns:a="http://schemas.openxmlformats.org/drawingml/2006/main">
               <a:ext uri="{FF2B5EF4-FFF2-40B4-BE49-F238E27FC236}">
-                <a16:creationId xmlns:a16="http://schemas.microsoft.com/office/drawing/2014/main" id="{299AB1C9-A1C7-4A99-9ED6-90AAAA76115A}"/>
+                <a16:creationId xmlns:a16="http://schemas.microsoft.com/office/drawing/2014/main" id="{6EAF55E4-A3B8-4797-A8E9-E4C920B2251F}"/>
               </a:ext>
             </a:extLst>
           </p:cNvPr>
@@ -13632,7 +13640,7 @@
           <p:cNvPr id="13" name="">
             <a:extLst xmlns:a="http://schemas.openxmlformats.org/drawingml/2006/main">
               <a:ext uri="{FF2B5EF4-FFF2-40B4-BE49-F238E27FC236}">
-                <a16:creationId xmlns:a16="http://schemas.microsoft.com/office/drawing/2014/main" id="{58C03BB1-CE6A-4138-8D2C-957F6C23C6FC}"/>
+                <a16:creationId xmlns:a16="http://schemas.microsoft.com/office/drawing/2014/main" id="{8B01E77F-22E4-43BE-B3C8-8EE15601EF40}"/>
               </a:ext>
             </a:extLst>
           </p:cNvPr>
@@ -13689,7 +13697,7 @@
           <p:cNvPr id="14" name="">
             <a:extLst xmlns:a="http://schemas.openxmlformats.org/drawingml/2006/main">
               <a:ext uri="{FF2B5EF4-FFF2-40B4-BE49-F238E27FC236}">
-                <a16:creationId xmlns:a16="http://schemas.microsoft.com/office/drawing/2014/main" id="{56462F57-FB11-4F9A-827B-4090F91B1805}"/>
+                <a16:creationId xmlns:a16="http://schemas.microsoft.com/office/drawing/2014/main" id="{50BEF1EE-5070-432A-95A9-E17D577D2E78}"/>
               </a:ext>
             </a:extLst>
           </p:cNvPr>
@@ -13723,7 +13731,7 @@
           <p:cNvPr id="15" name="">
             <a:extLst xmlns:a="http://schemas.openxmlformats.org/drawingml/2006/main">
               <a:ext uri="{FF2B5EF4-FFF2-40B4-BE49-F238E27FC236}">
-                <a16:creationId xmlns:a16="http://schemas.microsoft.com/office/drawing/2014/main" id="{19D3CCD1-D6EF-4BF1-B1AB-593195A320FF}"/>
+                <a16:creationId xmlns:a16="http://schemas.microsoft.com/office/drawing/2014/main" id="{C9AEFA3B-F474-4512-8CD1-977091B79254}"/>
               </a:ext>
             </a:extLst>
           </p:cNvPr>
@@ -13755,7 +13763,7 @@
           <p:cNvPr id="16" name="">
             <a:extLst xmlns:a="http://schemas.openxmlformats.org/drawingml/2006/main">
               <a:ext uri="{FF2B5EF4-FFF2-40B4-BE49-F238E27FC236}">
-                <a16:creationId xmlns:a16="http://schemas.microsoft.com/office/drawing/2014/main" id="{C75CCED3-EC88-446C-81AB-A0FE265F2228}"/>
+                <a16:creationId xmlns:a16="http://schemas.microsoft.com/office/drawing/2014/main" id="{DB0FD797-6157-4E58-8E4A-37847FEA4004}"/>
               </a:ext>
             </a:extLst>
           </p:cNvPr>
@@ -13812,7 +13820,7 @@
           <p:cNvPr id="17" name="">
             <a:extLst xmlns:a="http://schemas.openxmlformats.org/drawingml/2006/main">
               <a:ext uri="{FF2B5EF4-FFF2-40B4-BE49-F238E27FC236}">
-                <a16:creationId xmlns:a16="http://schemas.microsoft.com/office/drawing/2014/main" id="{A0B11781-8D31-42FD-A2F9-9E6427CFB765}"/>
+                <a16:creationId xmlns:a16="http://schemas.microsoft.com/office/drawing/2014/main" id="{60C4EB3E-145A-4AF5-88A4-47F50523F3AF}"/>
               </a:ext>
             </a:extLst>
           </p:cNvPr>
@@ -13869,7 +13877,7 @@
           <p:cNvPr id="18" name="">
             <a:extLst xmlns:a="http://schemas.openxmlformats.org/drawingml/2006/main">
               <a:ext uri="{FF2B5EF4-FFF2-40B4-BE49-F238E27FC236}">
-                <a16:creationId xmlns:a16="http://schemas.microsoft.com/office/drawing/2014/main" id="{1D97C3DD-2C14-43AB-8886-4475B6B730E2}"/>
+                <a16:creationId xmlns:a16="http://schemas.microsoft.com/office/drawing/2014/main" id="{9B6D5F93-8ED8-42CC-9E59-3903F2512ED6}"/>
               </a:ext>
             </a:extLst>
           </p:cNvPr>
@@ -13903,7 +13911,7 @@
           <p:cNvPr id="19" name="">
             <a:extLst xmlns:a="http://schemas.openxmlformats.org/drawingml/2006/main">
               <a:ext uri="{FF2B5EF4-FFF2-40B4-BE49-F238E27FC236}">
-                <a16:creationId xmlns:a16="http://schemas.microsoft.com/office/drawing/2014/main" id="{31D1334C-5564-4030-BBD0-29DCEF543AFD}"/>
+                <a16:creationId xmlns:a16="http://schemas.microsoft.com/office/drawing/2014/main" id="{9099DCAC-B0E0-4AD7-85CC-AB7E3730D74B}"/>
               </a:ext>
             </a:extLst>
           </p:cNvPr>
@@ -13935,7 +13943,7 @@
           <p:cNvPr id="20" name="">
             <a:extLst xmlns:a="http://schemas.openxmlformats.org/drawingml/2006/main">
               <a:ext uri="{FF2B5EF4-FFF2-40B4-BE49-F238E27FC236}">
-                <a16:creationId xmlns:a16="http://schemas.microsoft.com/office/drawing/2014/main" id="{62C2A4EF-C793-49F3-9A9F-D84E52EF309E}"/>
+                <a16:creationId xmlns:a16="http://schemas.microsoft.com/office/drawing/2014/main" id="{B909E9A7-EA18-4E4B-AD95-4609C9DD7DC2}"/>
               </a:ext>
             </a:extLst>
           </p:cNvPr>
@@ -13992,7 +14000,7 @@
           <p:cNvPr id="21" name="">
             <a:extLst xmlns:a="http://schemas.openxmlformats.org/drawingml/2006/main">
               <a:ext uri="{FF2B5EF4-FFF2-40B4-BE49-F238E27FC236}">
-                <a16:creationId xmlns:a16="http://schemas.microsoft.com/office/drawing/2014/main" id="{79E24B1C-4652-4ACD-8A95-D50F5380EBCC}"/>
+                <a16:creationId xmlns:a16="http://schemas.microsoft.com/office/drawing/2014/main" id="{BB646BF9-0C1E-4019-9752-A93F64702616}"/>
               </a:ext>
             </a:extLst>
           </p:cNvPr>
@@ -14047,7 +14055,7 @@
     </p:spTree>
     <p:extLst>
       <p:ext uri="{BB962C8B-B14F-4D97-AF65-F5344CB8AC3E}">
-        <p14:creationId xmlns:p14="http://schemas.microsoft.com/office/powerpoint/2010/main" val="881512076"/>
+        <p14:creationId xmlns:p14="http://schemas.microsoft.com/office/powerpoint/2010/main" val="1150048872"/>
       </p:ext>
     </p:extLst>
   </p:cSld>
